--- a/Presentasi_SPK_Pemilihan_Lokasi_Cabang_Baru.pptx
+++ b/Presentasi_SPK_Pemilihan_Lokasi_Cabang_Baru.pptx
@@ -4,6 +4,9 @@
   <p:sldMasterIdLst>
     <p:sldMasterId id="2147483648" r:id="rId1"/>
   </p:sldMasterIdLst>
+  <p:notesMasterIdLst>
+    <p:notesMasterId r:id="rId14"/>
+  </p:notesMasterIdLst>
   <p:sldIdLst>
     <p:sldId id="256" r:id="rId2"/>
     <p:sldId id="257" r:id="rId3"/>
@@ -18,9 +21,6 @@
     <p:sldId id="266" r:id="rId12"/>
     <p:sldId id="267" r:id="rId13"/>
   </p:sldIdLst>
-  <p:notesMasterIdLst>
-    <p:notesMasterId r:id="rId14"/>
-  </p:notesMasterIdLst>
   <p:sldSz cx="12192000" cy="6858000"/>
   <p:notesSz cx="6858000" cy="12192000"/>
   <p:defaultTextStyle>
@@ -115,6 +115,11 @@
       </a:defRPr>
     </a:lvl9pPr>
   </p:defaultTextStyle>
+  <p:extLst>
+    <p:ext uri="{EFAFB233-063F-42B5-8137-9DF3F51BA10A}">
+      <p15:sldGuideLst xmlns:p15="http://schemas.microsoft.com/office/powerpoint/2012/main"/>
+    </p:ext>
+  </p:extLst>
 </p:presentation>
 </file>
 
@@ -140,234 +145,10 @@
           <a:chExt cx="0" cy="0"/>
         </a:xfrm>
       </p:grpSpPr>
-      <p:sp>
-        <p:nvSpPr>
-          <p:cNvPr id="2" name="Header Placeholder 1"/>
-          <p:cNvSpPr>
-            <a:spLocks noGrp="1"/>
-          </p:cNvSpPr>
-          <p:nvPr>
-            <p:ph type="hdr" sz="quarter"/>
-          </p:nvPr>
-        </p:nvSpPr>
-        <p:spPr>
-          <a:xfrm>
-            <a:off x="0" y="0"/>
-            <a:ext cx="2971800" cy="458788"/>
-          </a:xfrm>
-          <a:prstGeom prst="rect">
-            <a:avLst/>
-          </a:prstGeom>
-        </p:spPr>
-        <p:txBody>
-          <a:bodyPr vert="horz" lIns="91440" tIns="45720" rIns="91440" bIns="45720" rtlCol="0"/>
-          <a:lstStyle>
-            <a:lvl1pPr algn="l">
-              <a:defRPr sz="1200"/>
-            </a:lvl1pPr>
-          </a:lstStyle>
-          <a:p>
-            <a:endParaRPr lang="en-US"/>
-          </a:p>
-        </p:txBody>
-      </p:sp>
-      <p:sp>
-        <p:nvSpPr>
-          <p:cNvPr id="3" name="Date Placeholder 2"/>
-          <p:cNvSpPr>
-            <a:spLocks noGrp="1"/>
-          </p:cNvSpPr>
-          <p:nvPr>
-            <p:ph type="dt" idx="1"/>
-          </p:nvPr>
-        </p:nvSpPr>
-        <p:spPr>
-          <a:xfrm>
-            <a:off x="3884613" y="0"/>
-            <a:ext cx="2971800" cy="458788"/>
-          </a:xfrm>
-          <a:prstGeom prst="rect">
-            <a:avLst/>
-          </a:prstGeom>
-        </p:spPr>
-        <p:txBody>
-          <a:bodyPr vert="horz" lIns="91440" tIns="45720" rIns="91440" bIns="45720" rtlCol="0"/>
-          <a:lstStyle>
-            <a:lvl1pPr algn="r">
-              <a:defRPr sz="1200"/>
-            </a:lvl1pPr>
-          </a:lstStyle>
-          <a:p>
-            <a:fld id="{5282F153-3F37-0F45-9E97-73ACFA13230C}" type="datetimeFigureOut">
-              <a:rPr lang="en-US"/>
-              <a:t>7/23/19</a:t>
-            </a:fld>
-            <a:endParaRPr lang="en-US"/>
-          </a:p>
-        </p:txBody>
-      </p:sp>
-      <p:sp>
-        <p:nvSpPr>
-          <p:cNvPr id="4" name="Slide Image Placeholder 3"/>
-          <p:cNvSpPr>
-            <a:spLocks noGrp="1" noRot="1" noChangeAspect="1"/>
-          </p:cNvSpPr>
-          <p:nvPr>
-            <p:ph type="sldImg" idx="2"/>
-          </p:nvPr>
-        </p:nvSpPr>
-        <p:spPr>
-          <a:xfrm>
-            <a:off x="685800" y="1143000"/>
-            <a:ext cx="5486400" cy="3086100"/>
-          </a:xfrm>
-          <a:prstGeom prst="rect">
-            <a:avLst/>
-          </a:prstGeom>
-          <a:noFill/>
-          <a:ln w="12700">
-            <a:solidFill>
-              <a:prstClr val="black"/>
-            </a:solidFill>
-          </a:ln>
-        </p:spPr>
-        <p:txBody>
-          <a:bodyPr vert="horz" lIns="91440" tIns="45720" rIns="91440" bIns="45720" rtlCol="0" anchor="ctr"/>
-          <a:lstStyle/>
-          <a:p>
-            <a:endParaRPr lang="en-US"/>
-          </a:p>
-        </p:txBody>
-      </p:sp>
-      <p:sp>
-        <p:nvSpPr>
-          <p:cNvPr id="5" name="Notes Placeholder 4"/>
-          <p:cNvSpPr>
-            <a:spLocks noGrp="1"/>
-          </p:cNvSpPr>
-          <p:nvPr>
-            <p:ph type="body" sz="quarter" idx="3"/>
-          </p:nvPr>
-        </p:nvSpPr>
-        <p:spPr>
-          <a:xfrm>
-            <a:off x="685800" y="4400550"/>
-            <a:ext cx="5486400" cy="3600450"/>
-          </a:xfrm>
-          <a:prstGeom prst="rect">
-            <a:avLst/>
-          </a:prstGeom>
-        </p:spPr>
-        <p:txBody>
-          <a:bodyPr vert="horz" lIns="91440" tIns="45720" rIns="91440" bIns="45720" rtlCol="0"/>
-          <a:lstStyle/>
-          <a:p>
-            <a:pPr lvl="0"/>
-            <a:r>
-              <a:rPr lang="en-US"/>
-              <a:t>Click to edit Master text styles</a:t>
-            </a:r>
-          </a:p>
-          <a:p>
-            <a:pPr lvl="1"/>
-            <a:r>
-              <a:rPr lang="en-US"/>
-              <a:t>Second level</a:t>
-            </a:r>
-          </a:p>
-          <a:p>
-            <a:pPr lvl="2"/>
-            <a:r>
-              <a:rPr lang="en-US"/>
-              <a:t>Third level</a:t>
-            </a:r>
-          </a:p>
-          <a:p>
-            <a:pPr lvl="3"/>
-            <a:r>
-              <a:rPr lang="en-US"/>
-              <a:t>Fourth level</a:t>
-            </a:r>
-          </a:p>
-          <a:p>
-            <a:pPr lvl="4"/>
-            <a:r>
-              <a:rPr lang="en-US"/>
-              <a:t>Fifth level</a:t>
-            </a:r>
-          </a:p>
-        </p:txBody>
-      </p:sp>
-      <p:sp>
-        <p:nvSpPr>
-          <p:cNvPr id="6" name="Footer Placeholder 5"/>
-          <p:cNvSpPr>
-            <a:spLocks noGrp="1"/>
-          </p:cNvSpPr>
-          <p:nvPr>
-            <p:ph type="ftr" sz="quarter" idx="4"/>
-          </p:nvPr>
-        </p:nvSpPr>
-        <p:spPr>
-          <a:xfrm>
-            <a:off x="0" y="8685213"/>
-            <a:ext cx="2971800" cy="458787"/>
-          </a:xfrm>
-          <a:prstGeom prst="rect">
-            <a:avLst/>
-          </a:prstGeom>
-        </p:spPr>
-        <p:txBody>
-          <a:bodyPr vert="horz" lIns="91440" tIns="45720" rIns="91440" bIns="45720" rtlCol="0" anchor="b"/>
-          <a:lstStyle>
-            <a:lvl1pPr algn="l">
-              <a:defRPr sz="1200"/>
-            </a:lvl1pPr>
-          </a:lstStyle>
-          <a:p>
-            <a:endParaRPr lang="en-US"/>
-          </a:p>
-        </p:txBody>
-      </p:sp>
-      <p:sp>
-        <p:nvSpPr>
-          <p:cNvPr id="7" name="Slide Number Placeholder 6"/>
-          <p:cNvSpPr>
-            <a:spLocks noGrp="1"/>
-          </p:cNvSpPr>
-          <p:nvPr>
-            <p:ph type="sldNum" sz="quarter" idx="5"/>
-          </p:nvPr>
-        </p:nvSpPr>
-        <p:spPr>
-          <a:xfrm>
-            <a:off x="3884613" y="8685213"/>
-            <a:ext cx="2971800" cy="458787"/>
-          </a:xfrm>
-          <a:prstGeom prst="rect">
-            <a:avLst/>
-          </a:prstGeom>
-        </p:spPr>
-        <p:txBody>
-          <a:bodyPr vert="horz" lIns="91440" tIns="45720" rIns="91440" bIns="45720" rtlCol="0" anchor="b"/>
-          <a:lstStyle>
-            <a:lvl1pPr algn="r">
-              <a:defRPr sz="1200"/>
-            </a:lvl1pPr>
-          </a:lstStyle>
-          <a:p>
-            <a:fld id="{CE5E9CC1-C706-0F49-92D6-E571CC5EEA8F}" type="slidenum">
-              <a:rPr lang="en-US"/>
-              <a:t>‹#›</a:t>
-            </a:fld>
-            <a:endParaRPr lang="en-US"/>
-          </a:p>
-        </p:txBody>
-      </p:sp>
     </p:spTree>
     <p:extLst>
       <p:ext uri="{BB962C8B-B14F-4D97-AF65-F5344CB8AC3E}">
-        <p14:creationId xmlns:p14="http://schemas.microsoft.com/office/powerpoint/2010/main" val="1024086991"/>
+        <p14:creationId xmlns:p14="http://schemas.microsoft.com/office/powerpoint/2010/main" val="2517235216"/>
       </p:ext>
     </p:extLst>
   </p:cSld>
@@ -511,10 +292,6 @@
           <a:bodyPr/>
           <a:lstStyle/>
           <a:p>
-            <a:r>
-              <a:rPr lang="en-US" dirty="0"/>
-              <a:t/>
-            </a:r>
             <a:endParaRPr lang="en-US" dirty="0"/>
           </a:p>
         </p:txBody>
@@ -599,10 +376,6 @@
           <a:bodyPr/>
           <a:lstStyle/>
           <a:p>
-            <a:r>
-              <a:rPr lang="en-US" dirty="0"/>
-              <a:t/>
-            </a:r>
             <a:endParaRPr lang="en-US" dirty="0"/>
           </a:p>
         </p:txBody>
@@ -687,10 +460,6 @@
           <a:bodyPr/>
           <a:lstStyle/>
           <a:p>
-            <a:r>
-              <a:rPr lang="en-US" dirty="0"/>
-              <a:t/>
-            </a:r>
             <a:endParaRPr lang="en-US" dirty="0"/>
           </a:p>
         </p:txBody>
@@ -775,10 +544,6 @@
           <a:bodyPr/>
           <a:lstStyle/>
           <a:p>
-            <a:r>
-              <a:rPr lang="en-US" dirty="0"/>
-              <a:t/>
-            </a:r>
             <a:endParaRPr lang="en-US" dirty="0"/>
           </a:p>
         </p:txBody>
@@ -863,10 +628,6 @@
           <a:bodyPr/>
           <a:lstStyle/>
           <a:p>
-            <a:r>
-              <a:rPr lang="en-US" dirty="0"/>
-              <a:t/>
-            </a:r>
             <a:endParaRPr lang="en-US" dirty="0"/>
           </a:p>
         </p:txBody>
@@ -951,10 +712,6 @@
           <a:bodyPr/>
           <a:lstStyle/>
           <a:p>
-            <a:r>
-              <a:rPr lang="en-US" dirty="0"/>
-              <a:t/>
-            </a:r>
             <a:endParaRPr lang="en-US" dirty="0"/>
           </a:p>
         </p:txBody>
@@ -1039,10 +796,6 @@
           <a:bodyPr/>
           <a:lstStyle/>
           <a:p>
-            <a:r>
-              <a:rPr lang="en-US" dirty="0"/>
-              <a:t/>
-            </a:r>
             <a:endParaRPr lang="en-US" dirty="0"/>
           </a:p>
         </p:txBody>
@@ -1127,10 +880,6 @@
           <a:bodyPr/>
           <a:lstStyle/>
           <a:p>
-            <a:r>
-              <a:rPr lang="en-US" dirty="0"/>
-              <a:t/>
-            </a:r>
             <a:endParaRPr lang="en-US" dirty="0"/>
           </a:p>
         </p:txBody>
@@ -1215,10 +964,6 @@
           <a:bodyPr/>
           <a:lstStyle/>
           <a:p>
-            <a:r>
-              <a:rPr lang="en-US" dirty="0"/>
-              <a:t/>
-            </a:r>
             <a:endParaRPr lang="en-US" dirty="0"/>
           </a:p>
         </p:txBody>
@@ -1303,10 +1048,6 @@
           <a:bodyPr/>
           <a:lstStyle/>
           <a:p>
-            <a:r>
-              <a:rPr lang="en-US" dirty="0"/>
-              <a:t/>
-            </a:r>
             <a:endParaRPr lang="en-US" dirty="0"/>
           </a:p>
         </p:txBody>
@@ -1391,10 +1132,6 @@
           <a:bodyPr/>
           <a:lstStyle/>
           <a:p>
-            <a:r>
-              <a:rPr lang="en-US" dirty="0"/>
-              <a:t/>
-            </a:r>
             <a:endParaRPr lang="en-US" dirty="0"/>
           </a:p>
         </p:txBody>
@@ -1479,10 +1216,6 @@
           <a:bodyPr/>
           <a:lstStyle/>
           <a:p>
-            <a:r>
-              <a:rPr lang="en-US" dirty="0"/>
-              <a:t/>
-            </a:r>
             <a:endParaRPr lang="en-US" dirty="0"/>
           </a:p>
         </p:txBody>
@@ -1556,6 +1289,11 @@
 <file path=ppt/slideMasters/slideMaster1.xml><?xml version="1.0" encoding="utf-8"?>
 <p:sldMaster xmlns:a="http://schemas.openxmlformats.org/drawingml/2006/main" xmlns:r="http://schemas.openxmlformats.org/officeDocument/2006/relationships" xmlns:p="http://schemas.openxmlformats.org/presentationml/2006/main">
   <p:cSld>
+    <p:bg>
+      <p:bgRef idx="1001">
+        <a:schemeClr val="bg1"/>
+      </p:bgRef>
+    </p:bg>
     <p:spTree>
       <p:nvGrpSpPr>
         <p:cNvPr id="1" name=""/>
@@ -1838,6 +1576,7 @@
         <a:solidFill>
           <a:srgbClr val="1E3A8A"/>
         </a:solidFill>
+        <a:effectLst/>
       </p:bgPr>
     </p:bg>
     <p:spTree>
@@ -1873,6 +1612,13 @@
           </a:solidFill>
           <a:ln/>
         </p:spPr>
+        <p:txBody>
+          <a:bodyPr/>
+          <a:lstStyle/>
+          <a:p>
+            <a:endParaRPr lang="en-US"/>
+          </a:p>
+        </p:txBody>
       </p:sp>
       <p:sp>
         <p:nvSpPr>
@@ -1895,11 +1641,11 @@
           <a:bodyPr wrap="square" lIns="0" tIns="0" rIns="0" bIns="0" rtlCol="0" anchor="ctr"/>
           <a:lstStyle/>
           <a:p>
-            <a:pPr indent="0" marL="0">
-              <a:buNone/>
-            </a:pPr>
-            <a:r>
-              <a:rPr lang="en-US" sz="1600" b="1" spc="300" kern="0" dirty="0">
+            <a:pPr marL="0" indent="0">
+              <a:buNone/>
+            </a:pPr>
+            <a:r>
+              <a:rPr lang="en-US" sz="1600" b="1" kern="0" spc="300" dirty="0">
                 <a:solidFill>
                   <a:srgbClr val="3B82F6"/>
                 </a:solidFill>
@@ -1934,7 +1680,7 @@
           <a:bodyPr wrap="square" lIns="0" tIns="0" rIns="0" bIns="0" rtlCol="0" anchor="ctr"/>
           <a:lstStyle/>
           <a:p>
-            <a:pPr indent="0" marL="0">
+            <a:pPr marL="0" indent="0">
               <a:buNone/>
             </a:pPr>
             <a:r>
@@ -1951,7 +1697,7 @@
             <a:endParaRPr lang="en-US" sz="4000" dirty="0"/>
           </a:p>
           <a:p>
-            <a:pPr indent="0" marL="0">
+            <a:pPr marL="0" indent="0">
               <a:buNone/>
             </a:pPr>
             <a:r>
@@ -1990,7 +1736,7 @@
           <a:bodyPr wrap="square" lIns="0" tIns="0" rIns="0" bIns="0" rtlCol="0" anchor="ctr"/>
           <a:lstStyle/>
           <a:p>
-            <a:pPr indent="0" marL="0">
+            <a:pPr marL="0" indent="0">
               <a:buNone/>
             </a:pPr>
             <a:r>
@@ -2007,7 +1753,7 @@
             <a:endParaRPr lang="en-US" sz="1600" dirty="0"/>
           </a:p>
           <a:p>
-            <a:pPr indent="0" marL="0">
+            <a:pPr marL="0" indent="0">
               <a:buNone/>
             </a:pPr>
             <a:r>
@@ -2046,7 +1792,7 @@
           <a:bodyPr wrap="square" lIns="0" tIns="0" rIns="0" bIns="0" rtlCol="0" anchor="ctr"/>
           <a:lstStyle/>
           <a:p>
-            <a:pPr indent="0" marL="0">
+            <a:pPr marL="0" indent="0">
               <a:buNone/>
             </a:pPr>
             <a:r>
@@ -2058,7 +1804,29 @@
                 <a:ea typeface="Arial" pitchFamily="34" charset="-122"/>
                 <a:cs typeface="Arial" pitchFamily="34" charset="-120"/>
               </a:rPr>
-              <a:t>Proyek Tugas Sistem Pendukung Keputusan</a:t>
+              <a:t>Andreas Anditya </a:t>
+            </a:r>
+            <a:r>
+              <a:rPr lang="en-US" sz="1400" dirty="0" err="1">
+                <a:solidFill>
+                  <a:srgbClr val="F59E0B"/>
+                </a:solidFill>
+                <a:latin typeface="Arial" pitchFamily="34" charset="0"/>
+                <a:ea typeface="Arial" pitchFamily="34" charset="-122"/>
+                <a:cs typeface="Arial" pitchFamily="34" charset="-120"/>
+              </a:rPr>
+              <a:t>Purnama</a:t>
+            </a:r>
+            <a:r>
+              <a:rPr lang="en-US" sz="1400" dirty="0">
+                <a:solidFill>
+                  <a:srgbClr val="F59E0B"/>
+                </a:solidFill>
+                <a:latin typeface="Arial" pitchFamily="34" charset="0"/>
+                <a:ea typeface="Arial" pitchFamily="34" charset="-122"/>
+                <a:cs typeface="Arial" pitchFamily="34" charset="-120"/>
+              </a:rPr>
+              <a:t> - 572392</a:t>
             </a:r>
             <a:endParaRPr lang="en-US" sz="1400" dirty="0"/>
           </a:p>
@@ -2080,6 +1848,7 @@
         <a:solidFill>
           <a:srgbClr val="F8FAFC"/>
         </a:solidFill>
+        <a:effectLst/>
       </p:bgPr>
     </p:bg>
     <p:spTree>
@@ -2117,11 +1886,11 @@
           <a:bodyPr wrap="square" lIns="0" tIns="0" rIns="0" bIns="0" rtlCol="0" anchor="ctr"/>
           <a:lstStyle/>
           <a:p>
-            <a:pPr indent="0" marL="0">
-              <a:buNone/>
-            </a:pPr>
-            <a:r>
-              <a:rPr lang="en-US" sz="1200" spc="200" kern="0" dirty="0">
+            <a:pPr marL="0" indent="0">
+              <a:buNone/>
+            </a:pPr>
+            <a:r>
+              <a:rPr lang="en-US" sz="1200" kern="0" spc="200" dirty="0">
                 <a:solidFill>
                   <a:srgbClr val="64748B"/>
                 </a:solidFill>
@@ -2156,7 +1925,7 @@
           <a:bodyPr wrap="square" lIns="0" tIns="0" rIns="0" bIns="0" rtlCol="0" anchor="ctr"/>
           <a:lstStyle/>
           <a:p>
-            <a:pPr indent="0" marL="0">
+            <a:pPr marL="0" indent="0">
               <a:buNone/>
             </a:pPr>
             <a:r>
@@ -2195,6 +1964,13 @@
           </a:solidFill>
           <a:ln/>
         </p:spPr>
+        <p:txBody>
+          <a:bodyPr/>
+          <a:lstStyle/>
+          <a:p>
+            <a:endParaRPr lang="en-US"/>
+          </a:p>
+        </p:txBody>
       </p:sp>
       <p:sp>
         <p:nvSpPr>
@@ -2217,7 +1993,7 @@
           <a:bodyPr wrap="square" lIns="0" tIns="0" rIns="0" bIns="0" rtlCol="0" anchor="ctr"/>
           <a:lstStyle/>
           <a:p>
-            <a:pPr indent="0" marL="0">
+            <a:pPr marL="0" indent="0">
               <a:buNone/>
             </a:pPr>
             <a:r>
@@ -2256,7 +2032,7 @@
           <a:bodyPr wrap="square" lIns="0" tIns="0" rIns="0" bIns="0" rtlCol="0" anchor="ctr"/>
           <a:lstStyle/>
           <a:p>
-            <a:pPr indent="0" marL="0">
+            <a:pPr marL="0" indent="0">
               <a:buNone/>
             </a:pPr>
             <a:r>
@@ -2295,7 +2071,7 @@
           <a:bodyPr wrap="square" lIns="0" tIns="0" rIns="0" bIns="0" rtlCol="0" anchor="ctr"/>
           <a:lstStyle/>
           <a:p>
-            <a:pPr indent="0" marL="0">
+            <a:pPr marL="0" indent="0">
               <a:buNone/>
             </a:pPr>
             <a:r>
@@ -2336,11 +2112,41 @@
             <a:tbl>
               <a:tblPr/>
               <a:tblGrid>
-                <a:gridCol w="1188720"/>
-                <a:gridCol w="4114800"/>
-                <a:gridCol w="1828800"/>
-                <a:gridCol w="1828800"/>
-                <a:gridCol w="2103120"/>
+                <a:gridCol w="1188720">
+                  <a:extLst>
+                    <a:ext uri="{9D8B030D-6E8A-4147-A177-3AD203B41FA5}">
+                      <a16:colId xmlns:a16="http://schemas.microsoft.com/office/drawing/2014/main" val="20000"/>
+                    </a:ext>
+                  </a:extLst>
+                </a:gridCol>
+                <a:gridCol w="4114800">
+                  <a:extLst>
+                    <a:ext uri="{9D8B030D-6E8A-4147-A177-3AD203B41FA5}">
+                      <a16:colId xmlns:a16="http://schemas.microsoft.com/office/drawing/2014/main" val="20001"/>
+                    </a:ext>
+                  </a:extLst>
+                </a:gridCol>
+                <a:gridCol w="1828800">
+                  <a:extLst>
+                    <a:ext uri="{9D8B030D-6E8A-4147-A177-3AD203B41FA5}">
+                      <a16:colId xmlns:a16="http://schemas.microsoft.com/office/drawing/2014/main" val="20002"/>
+                    </a:ext>
+                  </a:extLst>
+                </a:gridCol>
+                <a:gridCol w="1828800">
+                  <a:extLst>
+                    <a:ext uri="{9D8B030D-6E8A-4147-A177-3AD203B41FA5}">
+                      <a16:colId xmlns:a16="http://schemas.microsoft.com/office/drawing/2014/main" val="20003"/>
+                    </a:ext>
+                  </a:extLst>
+                </a:gridCol>
+                <a:gridCol w="2103120">
+                  <a:extLst>
+                    <a:ext uri="{9D8B030D-6E8A-4147-A177-3AD203B41FA5}">
+                      <a16:colId xmlns:a16="http://schemas.microsoft.com/office/drawing/2014/main" val="20004"/>
+                    </a:ext>
+                  </a:extLst>
+                </a:gridCol>
               </a:tblGrid>
               <a:tr h="640080">
                 <a:tc>
@@ -2348,7 +2154,7 @@
                     <a:bodyPr/>
                     <a:lstStyle/>
                     <a:p>
-                      <a:pPr algn="ctr" indent="0" marL="0">
+                      <a:pPr marL="0" indent="0" algn="ctr">
                         <a:buNone/>
                       </a:pPr>
                       <a:r>
@@ -2369,7 +2175,7 @@
                       </a:endParaRPr>
                     </a:p>
                   </a:txBody>
-                  <a:tcPr marL="91440" marR="91440" marT="45720" marB="45720" anchor="ctr">
+                  <a:tcPr anchor="ctr">
                     <a:lnL w="0" cap="flat" cmpd="sng" algn="ctr">
                       <a:noFill/>
                     </a:lnL>
@@ -2398,7 +2204,7 @@
                     <a:bodyPr/>
                     <a:lstStyle/>
                     <a:p>
-                      <a:pPr algn="ctr" indent="0" marL="0">
+                      <a:pPr marL="0" indent="0" algn="ctr">
                         <a:buNone/>
                       </a:pPr>
                       <a:r>
@@ -2419,7 +2225,7 @@
                       </a:endParaRPr>
                     </a:p>
                   </a:txBody>
-                  <a:tcPr marL="91440" marR="91440" marT="45720" marB="45720" anchor="ctr">
+                  <a:tcPr anchor="ctr">
                     <a:lnL w="0" cap="flat" cmpd="sng" algn="ctr">
                       <a:noFill/>
                     </a:lnL>
@@ -2448,7 +2254,7 @@
                     <a:bodyPr/>
                     <a:lstStyle/>
                     <a:p>
-                      <a:pPr algn="ctr" indent="0" marL="0">
+                      <a:pPr marL="0" indent="0" algn="ctr">
                         <a:buNone/>
                       </a:pPr>
                       <a:r>
@@ -2469,7 +2275,7 @@
                       </a:endParaRPr>
                     </a:p>
                   </a:txBody>
-                  <a:tcPr marL="91440" marR="91440" marT="45720" marB="45720" anchor="ctr">
+                  <a:tcPr anchor="ctr">
                     <a:lnL w="0" cap="flat" cmpd="sng" algn="ctr">
                       <a:noFill/>
                     </a:lnL>
@@ -2498,7 +2304,7 @@
                     <a:bodyPr/>
                     <a:lstStyle/>
                     <a:p>
-                      <a:pPr algn="ctr" indent="0" marL="0">
+                      <a:pPr marL="0" indent="0" algn="ctr">
                         <a:buNone/>
                       </a:pPr>
                       <a:r>
@@ -2519,7 +2325,7 @@
                       </a:endParaRPr>
                     </a:p>
                   </a:txBody>
-                  <a:tcPr marL="91440" marR="91440" marT="45720" marB="45720" anchor="ctr">
+                  <a:tcPr anchor="ctr">
                     <a:lnL w="0" cap="flat" cmpd="sng" algn="ctr">
                       <a:noFill/>
                     </a:lnL>
@@ -2548,7 +2354,7 @@
                     <a:bodyPr/>
                     <a:lstStyle/>
                     <a:p>
-                      <a:pPr algn="ctr" indent="0" marL="0">
+                      <a:pPr marL="0" indent="0" algn="ctr">
                         <a:buNone/>
                       </a:pPr>
                       <a:r>
@@ -2569,7 +2375,7 @@
                       </a:endParaRPr>
                     </a:p>
                   </a:txBody>
-                  <a:tcPr marL="91440" marR="91440" marT="45720" marB="45720" anchor="ctr">
+                  <a:tcPr anchor="ctr">
                     <a:lnL w="0" cap="flat" cmpd="sng" algn="ctr">
                       <a:noFill/>
                     </a:lnL>
@@ -2593,6 +2399,11 @@
                     </a:solidFill>
                   </a:tcPr>
                 </a:tc>
+                <a:extLst>
+                  <a:ext uri="{0D108BD9-81ED-4DB2-BD59-A6C34878D82A}">
+                    <a16:rowId xmlns:a16="http://schemas.microsoft.com/office/drawing/2014/main" val="10000"/>
+                  </a:ext>
+                </a:extLst>
               </a:tr>
               <a:tr h="640080">
                 <a:tc>
@@ -2600,7 +2411,7 @@
                     <a:bodyPr/>
                     <a:lstStyle/>
                     <a:p>
-                      <a:pPr algn="ctr" indent="0" marL="0">
+                      <a:pPr marL="0" indent="0" algn="ctr">
                         <a:buNone/>
                       </a:pPr>
                       <a:r>
@@ -2621,7 +2432,7 @@
                       </a:endParaRPr>
                     </a:p>
                   </a:txBody>
-                  <a:tcPr marL="91440" marR="91440" marT="45720" marB="45720" anchor="ctr">
+                  <a:tcPr anchor="ctr">
                     <a:lnL w="0" cap="flat" cmpd="sng" algn="ctr">
                       <a:noFill/>
                     </a:lnL>
@@ -2629,9 +2440,7 @@
                       <a:noFill/>
                     </a:lnR>
                     <a:lnT w="6350" cap="flat" cmpd="sng" algn="ctr">
-                      <a:solidFill>
-                        <a:srgbClr val="E2E8F0"/>
-                      </a:solidFill>
+                      <a:noFill/>
                       <a:prstDash val="solid"/>
                       <a:round/>
                       <a:headEnd type="none" w="med" len="med"/>
@@ -2647,7 +2456,7 @@
                     <a:bodyPr/>
                     <a:lstStyle/>
                     <a:p>
-                      <a:pPr algn="ctr" indent="0" marL="0">
+                      <a:pPr marL="0" indent="0" algn="ctr">
                         <a:buNone/>
                       </a:pPr>
                       <a:r>
@@ -2668,7 +2477,7 @@
                       </a:endParaRPr>
                     </a:p>
                   </a:txBody>
-                  <a:tcPr marL="91440" marR="91440" marT="45720" marB="45720" anchor="ctr">
+                  <a:tcPr anchor="ctr">
                     <a:lnL w="0" cap="flat" cmpd="sng" algn="ctr">
                       <a:noFill/>
                     </a:lnL>
@@ -2676,9 +2485,7 @@
                       <a:noFill/>
                     </a:lnR>
                     <a:lnT w="6350" cap="flat" cmpd="sng" algn="ctr">
-                      <a:solidFill>
-                        <a:srgbClr val="E2E8F0"/>
-                      </a:solidFill>
+                      <a:noFill/>
                       <a:prstDash val="solid"/>
                       <a:round/>
                       <a:headEnd type="none" w="med" len="med"/>
@@ -2694,7 +2501,7 @@
                     <a:bodyPr/>
                     <a:lstStyle/>
                     <a:p>
-                      <a:pPr algn="ctr" indent="0" marL="0">
+                      <a:pPr marL="0" indent="0" algn="ctr">
                         <a:buNone/>
                       </a:pPr>
                       <a:r>
@@ -2715,7 +2522,7 @@
                       </a:endParaRPr>
                     </a:p>
                   </a:txBody>
-                  <a:tcPr marL="91440" marR="91440" marT="45720" marB="45720" anchor="ctr">
+                  <a:tcPr anchor="ctr">
                     <a:lnL w="0" cap="flat" cmpd="sng" algn="ctr">
                       <a:noFill/>
                     </a:lnL>
@@ -2723,9 +2530,7 @@
                       <a:noFill/>
                     </a:lnR>
                     <a:lnT w="6350" cap="flat" cmpd="sng" algn="ctr">
-                      <a:solidFill>
-                        <a:srgbClr val="E2E8F0"/>
-                      </a:solidFill>
+                      <a:noFill/>
                       <a:prstDash val="solid"/>
                       <a:round/>
                       <a:headEnd type="none" w="med" len="med"/>
@@ -2741,7 +2546,7 @@
                     <a:bodyPr/>
                     <a:lstStyle/>
                     <a:p>
-                      <a:pPr algn="ctr" indent="0" marL="0">
+                      <a:pPr marL="0" indent="0" algn="ctr">
                         <a:buNone/>
                       </a:pPr>
                       <a:r>
@@ -2762,7 +2567,7 @@
                       </a:endParaRPr>
                     </a:p>
                   </a:txBody>
-                  <a:tcPr marL="91440" marR="91440" marT="45720" marB="45720" anchor="ctr">
+                  <a:tcPr anchor="ctr">
                     <a:lnL w="0" cap="flat" cmpd="sng" algn="ctr">
                       <a:noFill/>
                     </a:lnL>
@@ -2770,9 +2575,7 @@
                       <a:noFill/>
                     </a:lnR>
                     <a:lnT w="6350" cap="flat" cmpd="sng" algn="ctr">
-                      <a:solidFill>
-                        <a:srgbClr val="E2E8F0"/>
-                      </a:solidFill>
+                      <a:noFill/>
                       <a:prstDash val="solid"/>
                       <a:round/>
                       <a:headEnd type="none" w="med" len="med"/>
@@ -2788,7 +2591,7 @@
                     <a:bodyPr/>
                     <a:lstStyle/>
                     <a:p>
-                      <a:pPr algn="ctr" indent="0" marL="0">
+                      <a:pPr marL="0" indent="0" algn="ctr">
                         <a:buNone/>
                       </a:pPr>
                       <a:r>
@@ -2809,7 +2612,7 @@
                       </a:endParaRPr>
                     </a:p>
                   </a:txBody>
-                  <a:tcPr marL="91440" marR="91440" marT="45720" marB="45720" anchor="ctr">
+                  <a:tcPr anchor="ctr">
                     <a:lnL w="0" cap="flat" cmpd="sng" algn="ctr">
                       <a:noFill/>
                     </a:lnL>
@@ -2817,9 +2620,7 @@
                       <a:noFill/>
                     </a:lnR>
                     <a:lnT w="6350" cap="flat" cmpd="sng" algn="ctr">
-                      <a:solidFill>
-                        <a:srgbClr val="E2E8F0"/>
-                      </a:solidFill>
+                      <a:noFill/>
                       <a:prstDash val="solid"/>
                       <a:round/>
                       <a:headEnd type="none" w="med" len="med"/>
@@ -2830,6 +2631,11 @@
                     </a:lnB>
                   </a:tcPr>
                 </a:tc>
+                <a:extLst>
+                  <a:ext uri="{0D108BD9-81ED-4DB2-BD59-A6C34878D82A}">
+                    <a16:rowId xmlns:a16="http://schemas.microsoft.com/office/drawing/2014/main" val="10001"/>
+                  </a:ext>
+                </a:extLst>
               </a:tr>
               <a:tr h="640080">
                 <a:tc>
@@ -2837,7 +2643,7 @@
                     <a:bodyPr/>
                     <a:lstStyle/>
                     <a:p>
-                      <a:pPr algn="ctr" indent="0" marL="0">
+                      <a:pPr marL="0" indent="0" algn="ctr">
                         <a:buNone/>
                       </a:pPr>
                       <a:r>
@@ -2858,7 +2664,7 @@
                       </a:endParaRPr>
                     </a:p>
                   </a:txBody>
-                  <a:tcPr marL="91440" marR="91440" marT="45720" marB="45720" anchor="ctr">
+                  <a:tcPr anchor="ctr">
                     <a:lnL w="0" cap="flat" cmpd="sng" algn="ctr">
                       <a:noFill/>
                     </a:lnL>
@@ -2866,9 +2672,7 @@
                       <a:noFill/>
                     </a:lnR>
                     <a:lnT w="6350" cap="flat" cmpd="sng" algn="ctr">
-                      <a:solidFill>
-                        <a:srgbClr val="E2E8F0"/>
-                      </a:solidFill>
+                      <a:noFill/>
                       <a:prstDash val="solid"/>
                       <a:round/>
                       <a:headEnd type="none" w="med" len="med"/>
@@ -2884,7 +2688,7 @@
                     <a:bodyPr/>
                     <a:lstStyle/>
                     <a:p>
-                      <a:pPr algn="ctr" indent="0" marL="0">
+                      <a:pPr marL="0" indent="0" algn="ctr">
                         <a:buNone/>
                       </a:pPr>
                       <a:r>
@@ -2905,7 +2709,7 @@
                       </a:endParaRPr>
                     </a:p>
                   </a:txBody>
-                  <a:tcPr marL="91440" marR="91440" marT="45720" marB="45720" anchor="ctr">
+                  <a:tcPr anchor="ctr">
                     <a:lnL w="0" cap="flat" cmpd="sng" algn="ctr">
                       <a:noFill/>
                     </a:lnL>
@@ -2913,9 +2717,7 @@
                       <a:noFill/>
                     </a:lnR>
                     <a:lnT w="6350" cap="flat" cmpd="sng" algn="ctr">
-                      <a:solidFill>
-                        <a:srgbClr val="E2E8F0"/>
-                      </a:solidFill>
+                      <a:noFill/>
                       <a:prstDash val="solid"/>
                       <a:round/>
                       <a:headEnd type="none" w="med" len="med"/>
@@ -2931,7 +2733,7 @@
                     <a:bodyPr/>
                     <a:lstStyle/>
                     <a:p>
-                      <a:pPr algn="ctr" indent="0" marL="0">
+                      <a:pPr marL="0" indent="0" algn="ctr">
                         <a:buNone/>
                       </a:pPr>
                       <a:r>
@@ -2952,7 +2754,7 @@
                       </a:endParaRPr>
                     </a:p>
                   </a:txBody>
-                  <a:tcPr marL="91440" marR="91440" marT="45720" marB="45720" anchor="ctr">
+                  <a:tcPr anchor="ctr">
                     <a:lnL w="0" cap="flat" cmpd="sng" algn="ctr">
                       <a:noFill/>
                     </a:lnL>
@@ -2960,9 +2762,7 @@
                       <a:noFill/>
                     </a:lnR>
                     <a:lnT w="6350" cap="flat" cmpd="sng" algn="ctr">
-                      <a:solidFill>
-                        <a:srgbClr val="E2E8F0"/>
-                      </a:solidFill>
+                      <a:noFill/>
                       <a:prstDash val="solid"/>
                       <a:round/>
                       <a:headEnd type="none" w="med" len="med"/>
@@ -2978,7 +2778,7 @@
                     <a:bodyPr/>
                     <a:lstStyle/>
                     <a:p>
-                      <a:pPr algn="ctr" indent="0" marL="0">
+                      <a:pPr marL="0" indent="0" algn="ctr">
                         <a:buNone/>
                       </a:pPr>
                       <a:r>
@@ -2999,7 +2799,7 @@
                       </a:endParaRPr>
                     </a:p>
                   </a:txBody>
-                  <a:tcPr marL="91440" marR="91440" marT="45720" marB="45720" anchor="ctr">
+                  <a:tcPr anchor="ctr">
                     <a:lnL w="0" cap="flat" cmpd="sng" algn="ctr">
                       <a:noFill/>
                     </a:lnL>
@@ -3007,9 +2807,7 @@
                       <a:noFill/>
                     </a:lnR>
                     <a:lnT w="6350" cap="flat" cmpd="sng" algn="ctr">
-                      <a:solidFill>
-                        <a:srgbClr val="E2E8F0"/>
-                      </a:solidFill>
+                      <a:noFill/>
                       <a:prstDash val="solid"/>
                       <a:round/>
                       <a:headEnd type="none" w="med" len="med"/>
@@ -3025,7 +2823,7 @@
                     <a:bodyPr/>
                     <a:lstStyle/>
                     <a:p>
-                      <a:pPr algn="ctr" indent="0" marL="0">
+                      <a:pPr marL="0" indent="0" algn="ctr">
                         <a:buNone/>
                       </a:pPr>
                       <a:r>
@@ -3046,7 +2844,7 @@
                       </a:endParaRPr>
                     </a:p>
                   </a:txBody>
-                  <a:tcPr marL="91440" marR="91440" marT="45720" marB="45720" anchor="ctr">
+                  <a:tcPr anchor="ctr">
                     <a:lnL w="0" cap="flat" cmpd="sng" algn="ctr">
                       <a:noFill/>
                     </a:lnL>
@@ -3054,9 +2852,7 @@
                       <a:noFill/>
                     </a:lnR>
                     <a:lnT w="6350" cap="flat" cmpd="sng" algn="ctr">
-                      <a:solidFill>
-                        <a:srgbClr val="E2E8F0"/>
-                      </a:solidFill>
+                      <a:noFill/>
                       <a:prstDash val="solid"/>
                       <a:round/>
                       <a:headEnd type="none" w="med" len="med"/>
@@ -3067,6 +2863,11 @@
                     </a:lnB>
                   </a:tcPr>
                 </a:tc>
+                <a:extLst>
+                  <a:ext uri="{0D108BD9-81ED-4DB2-BD59-A6C34878D82A}">
+                    <a16:rowId xmlns:a16="http://schemas.microsoft.com/office/drawing/2014/main" val="10002"/>
+                  </a:ext>
+                </a:extLst>
               </a:tr>
               <a:tr h="640080">
                 <a:tc>
@@ -3074,7 +2875,7 @@
                     <a:bodyPr/>
                     <a:lstStyle/>
                     <a:p>
-                      <a:pPr algn="ctr" indent="0" marL="0">
+                      <a:pPr marL="0" indent="0" algn="ctr">
                         <a:buNone/>
                       </a:pPr>
                       <a:r>
@@ -3095,7 +2896,7 @@
                       </a:endParaRPr>
                     </a:p>
                   </a:txBody>
-                  <a:tcPr marL="91440" marR="91440" marT="45720" marB="45720" anchor="ctr">
+                  <a:tcPr anchor="ctr">
                     <a:lnL w="0" cap="flat" cmpd="sng" algn="ctr">
                       <a:noFill/>
                     </a:lnL>
@@ -3103,9 +2904,7 @@
                       <a:noFill/>
                     </a:lnR>
                     <a:lnT w="6350" cap="flat" cmpd="sng" algn="ctr">
-                      <a:solidFill>
-                        <a:srgbClr val="E2E8F0"/>
-                      </a:solidFill>
+                      <a:noFill/>
                       <a:prstDash val="solid"/>
                       <a:round/>
                       <a:headEnd type="none" w="med" len="med"/>
@@ -3121,7 +2920,7 @@
                     <a:bodyPr/>
                     <a:lstStyle/>
                     <a:p>
-                      <a:pPr algn="ctr" indent="0" marL="0">
+                      <a:pPr marL="0" indent="0" algn="ctr">
                         <a:buNone/>
                       </a:pPr>
                       <a:r>
@@ -3142,7 +2941,7 @@
                       </a:endParaRPr>
                     </a:p>
                   </a:txBody>
-                  <a:tcPr marL="91440" marR="91440" marT="45720" marB="45720" anchor="ctr">
+                  <a:tcPr anchor="ctr">
                     <a:lnL w="0" cap="flat" cmpd="sng" algn="ctr">
                       <a:noFill/>
                     </a:lnL>
@@ -3150,9 +2949,7 @@
                       <a:noFill/>
                     </a:lnR>
                     <a:lnT w="6350" cap="flat" cmpd="sng" algn="ctr">
-                      <a:solidFill>
-                        <a:srgbClr val="E2E8F0"/>
-                      </a:solidFill>
+                      <a:noFill/>
                       <a:prstDash val="solid"/>
                       <a:round/>
                       <a:headEnd type="none" w="med" len="med"/>
@@ -3168,7 +2965,7 @@
                     <a:bodyPr/>
                     <a:lstStyle/>
                     <a:p>
-                      <a:pPr algn="ctr" indent="0" marL="0">
+                      <a:pPr marL="0" indent="0" algn="ctr">
                         <a:buNone/>
                       </a:pPr>
                       <a:r>
@@ -3189,7 +2986,7 @@
                       </a:endParaRPr>
                     </a:p>
                   </a:txBody>
-                  <a:tcPr marL="91440" marR="91440" marT="45720" marB="45720" anchor="ctr">
+                  <a:tcPr anchor="ctr">
                     <a:lnL w="0" cap="flat" cmpd="sng" algn="ctr">
                       <a:noFill/>
                     </a:lnL>
@@ -3197,9 +2994,7 @@
                       <a:noFill/>
                     </a:lnR>
                     <a:lnT w="6350" cap="flat" cmpd="sng" algn="ctr">
-                      <a:solidFill>
-                        <a:srgbClr val="E2E8F0"/>
-                      </a:solidFill>
+                      <a:noFill/>
                       <a:prstDash val="solid"/>
                       <a:round/>
                       <a:headEnd type="none" w="med" len="med"/>
@@ -3215,7 +3010,7 @@
                     <a:bodyPr/>
                     <a:lstStyle/>
                     <a:p>
-                      <a:pPr algn="ctr" indent="0" marL="0">
+                      <a:pPr marL="0" indent="0" algn="ctr">
                         <a:buNone/>
                       </a:pPr>
                       <a:r>
@@ -3236,7 +3031,7 @@
                       </a:endParaRPr>
                     </a:p>
                   </a:txBody>
-                  <a:tcPr marL="91440" marR="91440" marT="45720" marB="45720" anchor="ctr">
+                  <a:tcPr anchor="ctr">
                     <a:lnL w="0" cap="flat" cmpd="sng" algn="ctr">
                       <a:noFill/>
                     </a:lnL>
@@ -3244,9 +3039,7 @@
                       <a:noFill/>
                     </a:lnR>
                     <a:lnT w="6350" cap="flat" cmpd="sng" algn="ctr">
-                      <a:solidFill>
-                        <a:srgbClr val="E2E8F0"/>
-                      </a:solidFill>
+                      <a:noFill/>
                       <a:prstDash val="solid"/>
                       <a:round/>
                       <a:headEnd type="none" w="med" len="med"/>
@@ -3262,7 +3055,7 @@
                     <a:bodyPr/>
                     <a:lstStyle/>
                     <a:p>
-                      <a:pPr algn="ctr" indent="0" marL="0">
+                      <a:pPr marL="0" indent="0" algn="ctr">
                         <a:buNone/>
                       </a:pPr>
                       <a:r>
@@ -3283,7 +3076,7 @@
                       </a:endParaRPr>
                     </a:p>
                   </a:txBody>
-                  <a:tcPr marL="91440" marR="91440" marT="45720" marB="45720" anchor="ctr">
+                  <a:tcPr anchor="ctr">
                     <a:lnL w="0" cap="flat" cmpd="sng" algn="ctr">
                       <a:noFill/>
                     </a:lnL>
@@ -3291,9 +3084,7 @@
                       <a:noFill/>
                     </a:lnR>
                     <a:lnT w="6350" cap="flat" cmpd="sng" algn="ctr">
-                      <a:solidFill>
-                        <a:srgbClr val="E2E8F0"/>
-                      </a:solidFill>
+                      <a:noFill/>
                       <a:prstDash val="solid"/>
                       <a:round/>
                       <a:headEnd type="none" w="med" len="med"/>
@@ -3304,6 +3095,11 @@
                     </a:lnB>
                   </a:tcPr>
                 </a:tc>
+                <a:extLst>
+                  <a:ext uri="{0D108BD9-81ED-4DB2-BD59-A6C34878D82A}">
+                    <a16:rowId xmlns:a16="http://schemas.microsoft.com/office/drawing/2014/main" val="10003"/>
+                  </a:ext>
+                </a:extLst>
               </a:tr>
               <a:tr h="640080">
                 <a:tc>
@@ -3311,7 +3107,7 @@
                     <a:bodyPr/>
                     <a:lstStyle/>
                     <a:p>
-                      <a:pPr algn="ctr" indent="0" marL="0">
+                      <a:pPr marL="0" indent="0" algn="ctr">
                         <a:buNone/>
                       </a:pPr>
                       <a:r>
@@ -3332,7 +3128,7 @@
                       </a:endParaRPr>
                     </a:p>
                   </a:txBody>
-                  <a:tcPr marL="91440" marR="91440" marT="45720" marB="45720" anchor="ctr">
+                  <a:tcPr anchor="ctr">
                     <a:lnL w="0" cap="flat" cmpd="sng" algn="ctr">
                       <a:noFill/>
                     </a:lnL>
@@ -3340,9 +3136,7 @@
                       <a:noFill/>
                     </a:lnR>
                     <a:lnT w="6350" cap="flat" cmpd="sng" algn="ctr">
-                      <a:solidFill>
-                        <a:srgbClr val="E2E8F0"/>
-                      </a:solidFill>
+                      <a:noFill/>
                       <a:prstDash val="solid"/>
                       <a:round/>
                       <a:headEnd type="none" w="med" len="med"/>
@@ -3358,7 +3152,7 @@
                     <a:bodyPr/>
                     <a:lstStyle/>
                     <a:p>
-                      <a:pPr algn="ctr" indent="0" marL="0">
+                      <a:pPr marL="0" indent="0" algn="ctr">
                         <a:buNone/>
                       </a:pPr>
                       <a:r>
@@ -3379,7 +3173,7 @@
                       </a:endParaRPr>
                     </a:p>
                   </a:txBody>
-                  <a:tcPr marL="91440" marR="91440" marT="45720" marB="45720" anchor="ctr">
+                  <a:tcPr anchor="ctr">
                     <a:lnL w="0" cap="flat" cmpd="sng" algn="ctr">
                       <a:noFill/>
                     </a:lnL>
@@ -3387,9 +3181,7 @@
                       <a:noFill/>
                     </a:lnR>
                     <a:lnT w="6350" cap="flat" cmpd="sng" algn="ctr">
-                      <a:solidFill>
-                        <a:srgbClr val="E2E8F0"/>
-                      </a:solidFill>
+                      <a:noFill/>
                       <a:prstDash val="solid"/>
                       <a:round/>
                       <a:headEnd type="none" w="med" len="med"/>
@@ -3405,7 +3197,7 @@
                     <a:bodyPr/>
                     <a:lstStyle/>
                     <a:p>
-                      <a:pPr algn="ctr" indent="0" marL="0">
+                      <a:pPr marL="0" indent="0" algn="ctr">
                         <a:buNone/>
                       </a:pPr>
                       <a:r>
@@ -3426,7 +3218,7 @@
                       </a:endParaRPr>
                     </a:p>
                   </a:txBody>
-                  <a:tcPr marL="91440" marR="91440" marT="45720" marB="45720" anchor="ctr">
+                  <a:tcPr anchor="ctr">
                     <a:lnL w="0" cap="flat" cmpd="sng" algn="ctr">
                       <a:noFill/>
                     </a:lnL>
@@ -3434,9 +3226,7 @@
                       <a:noFill/>
                     </a:lnR>
                     <a:lnT w="6350" cap="flat" cmpd="sng" algn="ctr">
-                      <a:solidFill>
-                        <a:srgbClr val="E2E8F0"/>
-                      </a:solidFill>
+                      <a:noFill/>
                       <a:prstDash val="solid"/>
                       <a:round/>
                       <a:headEnd type="none" w="med" len="med"/>
@@ -3452,7 +3242,7 @@
                     <a:bodyPr/>
                     <a:lstStyle/>
                     <a:p>
-                      <a:pPr algn="ctr" indent="0" marL="0">
+                      <a:pPr marL="0" indent="0" algn="ctr">
                         <a:buNone/>
                       </a:pPr>
                       <a:r>
@@ -3473,7 +3263,7 @@
                       </a:endParaRPr>
                     </a:p>
                   </a:txBody>
-                  <a:tcPr marL="91440" marR="91440" marT="45720" marB="45720" anchor="ctr">
+                  <a:tcPr anchor="ctr">
                     <a:lnL w="0" cap="flat" cmpd="sng" algn="ctr">
                       <a:noFill/>
                     </a:lnL>
@@ -3481,9 +3271,7 @@
                       <a:noFill/>
                     </a:lnR>
                     <a:lnT w="6350" cap="flat" cmpd="sng" algn="ctr">
-                      <a:solidFill>
-                        <a:srgbClr val="E2E8F0"/>
-                      </a:solidFill>
+                      <a:noFill/>
                       <a:prstDash val="solid"/>
                       <a:round/>
                       <a:headEnd type="none" w="med" len="med"/>
@@ -3499,7 +3287,7 @@
                     <a:bodyPr/>
                     <a:lstStyle/>
                     <a:p>
-                      <a:pPr algn="ctr" indent="0" marL="0">
+                      <a:pPr marL="0" indent="0" algn="ctr">
                         <a:buNone/>
                       </a:pPr>
                       <a:r>
@@ -3520,7 +3308,7 @@
                       </a:endParaRPr>
                     </a:p>
                   </a:txBody>
-                  <a:tcPr marL="91440" marR="91440" marT="45720" marB="45720" anchor="ctr">
+                  <a:tcPr anchor="ctr">
                     <a:lnL w="0" cap="flat" cmpd="sng" algn="ctr">
                       <a:noFill/>
                     </a:lnL>
@@ -3528,9 +3316,7 @@
                       <a:noFill/>
                     </a:lnR>
                     <a:lnT w="6350" cap="flat" cmpd="sng" algn="ctr">
-                      <a:solidFill>
-                        <a:srgbClr val="E2E8F0"/>
-                      </a:solidFill>
+                      <a:noFill/>
                       <a:prstDash val="solid"/>
                       <a:round/>
                       <a:headEnd type="none" w="med" len="med"/>
@@ -3541,6 +3327,11 @@
                     </a:lnB>
                   </a:tcPr>
                 </a:tc>
+                <a:extLst>
+                  <a:ext uri="{0D108BD9-81ED-4DB2-BD59-A6C34878D82A}">
+                    <a16:rowId xmlns:a16="http://schemas.microsoft.com/office/drawing/2014/main" val="10004"/>
+                  </a:ext>
+                </a:extLst>
               </a:tr>
             </a:tbl>
           </a:graphicData>
@@ -3565,6 +3356,13 @@
           </a:solidFill>
           <a:ln/>
         </p:spPr>
+        <p:txBody>
+          <a:bodyPr/>
+          <a:lstStyle/>
+          <a:p>
+            <a:endParaRPr lang="en-US"/>
+          </a:p>
+        </p:txBody>
       </p:sp>
       <p:sp>
         <p:nvSpPr>
@@ -3587,7 +3385,7 @@
           <a:bodyPr wrap="square" lIns="0" tIns="0" rIns="0" bIns="0" rtlCol="0" anchor="ctr"/>
           <a:lstStyle/>
           <a:p>
-            <a:pPr indent="0" marL="0">
+            <a:pPr marL="0" indent="0">
               <a:buNone/>
             </a:pPr>
             <a:r>
@@ -3607,7 +3405,7 @@
       </p:sp>
       <p:sp>
         <p:nvSpPr>
-          <p:cNvPr id="11" name="Text 8"/>
+          <p:cNvPr id="8" name="Text 8"/>
           <p:cNvSpPr/>
           <p:nvPr/>
         </p:nvSpPr>
@@ -3626,7 +3424,7 @@
           <a:bodyPr wrap="square" lIns="0" tIns="0" rIns="0" bIns="0" rtlCol="0" anchor="ctr"/>
           <a:lstStyle/>
           <a:p>
-            <a:pPr algn="r" indent="0" marL="0">
+            <a:pPr marL="0" indent="0" algn="r">
               <a:buNone/>
             </a:pPr>
             <a:r>
@@ -3660,6 +3458,7 @@
         <a:solidFill>
           <a:srgbClr val="F8FAFC"/>
         </a:solidFill>
+        <a:effectLst/>
       </p:bgPr>
     </p:bg>
     <p:spTree>
@@ -3697,11 +3496,11 @@
           <a:bodyPr wrap="square" lIns="0" tIns="0" rIns="0" bIns="0" rtlCol="0" anchor="ctr"/>
           <a:lstStyle/>
           <a:p>
-            <a:pPr indent="0" marL="0">
-              <a:buNone/>
-            </a:pPr>
-            <a:r>
-              <a:rPr lang="en-US" sz="1200" spc="200" kern="0" dirty="0">
+            <a:pPr marL="0" indent="0">
+              <a:buNone/>
+            </a:pPr>
+            <a:r>
+              <a:rPr lang="en-US" sz="1200" kern="0" spc="200" dirty="0">
                 <a:solidFill>
                   <a:srgbClr val="64748B"/>
                 </a:solidFill>
@@ -3736,7 +3535,7 @@
           <a:bodyPr wrap="square" lIns="0" tIns="0" rIns="0" bIns="0" rtlCol="0" anchor="ctr"/>
           <a:lstStyle/>
           <a:p>
-            <a:pPr indent="0" marL="0">
+            <a:pPr marL="0" indent="0">
               <a:buNone/>
             </a:pPr>
             <a:r>
@@ -3775,13 +3574,20 @@
           </a:solidFill>
           <a:ln/>
           <a:effectLst>
-            <a:outerShdw sx="100000" sy="100000" kx="0" ky="0" algn="bl" rotWithShape="0" blurRad="76200" dist="12700" dir="16200000">
+            <a:outerShdw blurRad="76200" dist="12700" dir="16200000" algn="bl" rotWithShape="0">
               <a:srgbClr val="000000">
                 <a:alpha val="5000"/>
               </a:srgbClr>
             </a:outerShdw>
           </a:effectLst>
         </p:spPr>
+        <p:txBody>
+          <a:bodyPr/>
+          <a:lstStyle/>
+          <a:p>
+            <a:endParaRPr lang="en-US"/>
+          </a:p>
+        </p:txBody>
       </p:sp>
       <p:sp>
         <p:nvSpPr>
@@ -3802,6 +3608,13 @@
           </a:solidFill>
           <a:ln/>
         </p:spPr>
+        <p:txBody>
+          <a:bodyPr/>
+          <a:lstStyle/>
+          <a:p>
+            <a:endParaRPr lang="en-US"/>
+          </a:p>
+        </p:txBody>
       </p:sp>
       <p:sp>
         <p:nvSpPr>
@@ -3824,7 +3637,7 @@
           <a:bodyPr wrap="square" lIns="0" tIns="0" rIns="0" bIns="0" rtlCol="0" anchor="ctr"/>
           <a:lstStyle/>
           <a:p>
-            <a:pPr algn="ctr" indent="0" marL="0">
+            <a:pPr marL="0" indent="0" algn="ctr">
               <a:buNone/>
             </a:pPr>
             <a:r>
@@ -3863,7 +3676,7 @@
           <a:bodyPr wrap="square" lIns="0" tIns="0" rIns="0" bIns="0" rtlCol="0" anchor="ctr"/>
           <a:lstStyle/>
           <a:p>
-            <a:pPr indent="0" marL="0">
+            <a:pPr marL="0" indent="0">
               <a:buNone/>
             </a:pPr>
             <a:r>
@@ -3902,13 +3715,20 @@
           </a:solidFill>
           <a:ln/>
           <a:effectLst>
-            <a:outerShdw sx="100000" sy="100000" kx="0" ky="0" algn="bl" rotWithShape="0" blurRad="76200" dist="12700" dir="16200000">
+            <a:outerShdw blurRad="76200" dist="12700" dir="16200000" algn="bl" rotWithShape="0">
               <a:srgbClr val="000000">
                 <a:alpha val="5000"/>
               </a:srgbClr>
             </a:outerShdw>
           </a:effectLst>
         </p:spPr>
+        <p:txBody>
+          <a:bodyPr/>
+          <a:lstStyle/>
+          <a:p>
+            <a:endParaRPr lang="en-US"/>
+          </a:p>
+        </p:txBody>
       </p:sp>
       <p:sp>
         <p:nvSpPr>
@@ -3929,6 +3749,13 @@
           </a:solidFill>
           <a:ln/>
         </p:spPr>
+        <p:txBody>
+          <a:bodyPr/>
+          <a:lstStyle/>
+          <a:p>
+            <a:endParaRPr lang="en-US"/>
+          </a:p>
+        </p:txBody>
       </p:sp>
       <p:sp>
         <p:nvSpPr>
@@ -3951,7 +3778,7 @@
           <a:bodyPr wrap="square" lIns="0" tIns="0" rIns="0" bIns="0" rtlCol="0" anchor="ctr"/>
           <a:lstStyle/>
           <a:p>
-            <a:pPr algn="ctr" indent="0" marL="0">
+            <a:pPr marL="0" indent="0" algn="ctr">
               <a:buNone/>
             </a:pPr>
             <a:r>
@@ -3990,7 +3817,7 @@
           <a:bodyPr wrap="square" lIns="0" tIns="0" rIns="0" bIns="0" rtlCol="0" anchor="ctr"/>
           <a:lstStyle/>
           <a:p>
-            <a:pPr indent="0" marL="0">
+            <a:pPr marL="0" indent="0">
               <a:buNone/>
             </a:pPr>
             <a:r>
@@ -4029,13 +3856,20 @@
           </a:solidFill>
           <a:ln/>
           <a:effectLst>
-            <a:outerShdw sx="100000" sy="100000" kx="0" ky="0" algn="bl" rotWithShape="0" blurRad="76200" dist="12700" dir="16200000">
+            <a:outerShdw blurRad="76200" dist="12700" dir="16200000" algn="bl" rotWithShape="0">
               <a:srgbClr val="000000">
                 <a:alpha val="5000"/>
               </a:srgbClr>
             </a:outerShdw>
           </a:effectLst>
         </p:spPr>
+        <p:txBody>
+          <a:bodyPr/>
+          <a:lstStyle/>
+          <a:p>
+            <a:endParaRPr lang="en-US"/>
+          </a:p>
+        </p:txBody>
       </p:sp>
       <p:sp>
         <p:nvSpPr>
@@ -4056,6 +3890,13 @@
           </a:solidFill>
           <a:ln/>
         </p:spPr>
+        <p:txBody>
+          <a:bodyPr/>
+          <a:lstStyle/>
+          <a:p>
+            <a:endParaRPr lang="en-US"/>
+          </a:p>
+        </p:txBody>
       </p:sp>
       <p:sp>
         <p:nvSpPr>
@@ -4078,7 +3919,7 @@
           <a:bodyPr wrap="square" lIns="0" tIns="0" rIns="0" bIns="0" rtlCol="0" anchor="ctr"/>
           <a:lstStyle/>
           <a:p>
-            <a:pPr algn="ctr" indent="0" marL="0">
+            <a:pPr marL="0" indent="0" algn="ctr">
               <a:buNone/>
             </a:pPr>
             <a:r>
@@ -4117,7 +3958,7 @@
           <a:bodyPr wrap="square" lIns="0" tIns="0" rIns="0" bIns="0" rtlCol="0" anchor="ctr"/>
           <a:lstStyle/>
           <a:p>
-            <a:pPr indent="0" marL="0">
+            <a:pPr marL="0" indent="0">
               <a:buNone/>
             </a:pPr>
             <a:r>
@@ -4156,13 +3997,20 @@
           </a:solidFill>
           <a:ln/>
           <a:effectLst>
-            <a:outerShdw sx="100000" sy="100000" kx="0" ky="0" algn="bl" rotWithShape="0" blurRad="76200" dist="12700" dir="16200000">
+            <a:outerShdw blurRad="76200" dist="12700" dir="16200000" algn="bl" rotWithShape="0">
               <a:srgbClr val="000000">
                 <a:alpha val="5000"/>
               </a:srgbClr>
             </a:outerShdw>
           </a:effectLst>
         </p:spPr>
+        <p:txBody>
+          <a:bodyPr/>
+          <a:lstStyle/>
+          <a:p>
+            <a:endParaRPr lang="en-US"/>
+          </a:p>
+        </p:txBody>
       </p:sp>
       <p:sp>
         <p:nvSpPr>
@@ -4183,6 +4031,13 @@
           </a:solidFill>
           <a:ln/>
         </p:spPr>
+        <p:txBody>
+          <a:bodyPr/>
+          <a:lstStyle/>
+          <a:p>
+            <a:endParaRPr lang="en-US"/>
+          </a:p>
+        </p:txBody>
       </p:sp>
       <p:sp>
         <p:nvSpPr>
@@ -4205,7 +4060,7 @@
           <a:bodyPr wrap="square" lIns="0" tIns="0" rIns="0" bIns="0" rtlCol="0" anchor="ctr"/>
           <a:lstStyle/>
           <a:p>
-            <a:pPr algn="ctr" indent="0" marL="0">
+            <a:pPr marL="0" indent="0" algn="ctr">
               <a:buNone/>
             </a:pPr>
             <a:r>
@@ -4244,7 +4099,7 @@
           <a:bodyPr wrap="square" lIns="0" tIns="0" rIns="0" bIns="0" rtlCol="0" anchor="ctr"/>
           <a:lstStyle/>
           <a:p>
-            <a:pPr indent="0" marL="0">
+            <a:pPr marL="0" indent="0">
               <a:buNone/>
             </a:pPr>
             <a:r>
@@ -4283,13 +4138,20 @@
           </a:solidFill>
           <a:ln/>
           <a:effectLst>
-            <a:outerShdw sx="100000" sy="100000" kx="0" ky="0" algn="bl" rotWithShape="0" blurRad="76200" dist="12700" dir="16200000">
+            <a:outerShdw blurRad="76200" dist="12700" dir="16200000" algn="bl" rotWithShape="0">
               <a:srgbClr val="000000">
                 <a:alpha val="5000"/>
               </a:srgbClr>
             </a:outerShdw>
           </a:effectLst>
         </p:spPr>
+        <p:txBody>
+          <a:bodyPr/>
+          <a:lstStyle/>
+          <a:p>
+            <a:endParaRPr lang="en-US"/>
+          </a:p>
+        </p:txBody>
       </p:sp>
       <p:sp>
         <p:nvSpPr>
@@ -4310,6 +4172,13 @@
           </a:solidFill>
           <a:ln/>
         </p:spPr>
+        <p:txBody>
+          <a:bodyPr/>
+          <a:lstStyle/>
+          <a:p>
+            <a:endParaRPr lang="en-US"/>
+          </a:p>
+        </p:txBody>
       </p:sp>
       <p:sp>
         <p:nvSpPr>
@@ -4332,7 +4201,7 @@
           <a:bodyPr wrap="square" lIns="0" tIns="0" rIns="0" bIns="0" rtlCol="0" anchor="ctr"/>
           <a:lstStyle/>
           <a:p>
-            <a:pPr algn="ctr" indent="0" marL="0">
+            <a:pPr marL="0" indent="0" algn="ctr">
               <a:buNone/>
             </a:pPr>
             <a:r>
@@ -4371,7 +4240,7 @@
           <a:bodyPr wrap="square" lIns="0" tIns="0" rIns="0" bIns="0" rtlCol="0" anchor="ctr"/>
           <a:lstStyle/>
           <a:p>
-            <a:pPr indent="0" marL="0">
+            <a:pPr marL="0" indent="0">
               <a:buNone/>
             </a:pPr>
             <a:r>
@@ -4408,6 +4277,13 @@
           </a:solidFill>
           <a:ln/>
         </p:spPr>
+        <p:txBody>
+          <a:bodyPr/>
+          <a:lstStyle/>
+          <a:p>
+            <a:endParaRPr lang="en-US"/>
+          </a:p>
+        </p:txBody>
       </p:sp>
       <p:sp>
         <p:nvSpPr>
@@ -4430,7 +4306,7 @@
           <a:bodyPr wrap="square" lIns="0" tIns="0" rIns="0" bIns="0" rtlCol="0" anchor="ctr"/>
           <a:lstStyle/>
           <a:p>
-            <a:pPr indent="0" marL="0">
+            <a:pPr marL="0" indent="0">
               <a:buNone/>
             </a:pPr>
             <a:r>
@@ -4469,7 +4345,7 @@
           <a:bodyPr wrap="square" lIns="0" tIns="0" rIns="0" bIns="0" rtlCol="0" anchor="ctr"/>
           <a:lstStyle/>
           <a:p>
-            <a:pPr algn="r" indent="0" marL="0">
+            <a:pPr marL="0" indent="0" algn="r">
               <a:buNone/>
             </a:pPr>
             <a:r>
@@ -4503,6 +4379,7 @@
         <a:solidFill>
           <a:srgbClr val="1E3A8A"/>
         </a:solidFill>
+        <a:effectLst/>
       </p:bgPr>
     </p:bg>
     <p:spTree>
@@ -4538,6 +4415,13 @@
           </a:solidFill>
           <a:ln/>
         </p:spPr>
+        <p:txBody>
+          <a:bodyPr/>
+          <a:lstStyle/>
+          <a:p>
+            <a:endParaRPr lang="en-US"/>
+          </a:p>
+        </p:txBody>
       </p:sp>
       <p:sp>
         <p:nvSpPr>
@@ -4560,7 +4444,7 @@
           <a:bodyPr wrap="square" lIns="0" tIns="0" rIns="0" bIns="0" rtlCol="0" anchor="ctr"/>
           <a:lstStyle/>
           <a:p>
-            <a:pPr indent="0" marL="0">
+            <a:pPr marL="0" indent="0">
               <a:buNone/>
             </a:pPr>
             <a:r>
@@ -4599,7 +4483,7 @@
           <a:bodyPr wrap="square" lIns="0" tIns="0" rIns="0" bIns="0" rtlCol="0" anchor="ctr"/>
           <a:lstStyle/>
           <a:p>
-            <a:pPr indent="0" marL="0">
+            <a:pPr marL="0" indent="0">
               <a:buNone/>
             </a:pPr>
             <a:r>
@@ -4638,7 +4522,7 @@
           <a:bodyPr wrap="square" lIns="0" tIns="0" rIns="0" bIns="0" rtlCol="0" anchor="ctr"/>
           <a:lstStyle/>
           <a:p>
-            <a:pPr indent="0" marL="0">
+            <a:pPr marL="0" indent="0">
               <a:buNone/>
             </a:pPr>
             <a:r>
@@ -4672,6 +4556,7 @@
         <a:solidFill>
           <a:srgbClr val="F8FAFC"/>
         </a:solidFill>
+        <a:effectLst/>
       </p:bgPr>
     </p:bg>
     <p:spTree>
@@ -4709,11 +4594,11 @@
           <a:bodyPr wrap="square" lIns="0" tIns="0" rIns="0" bIns="0" rtlCol="0" anchor="ctr"/>
           <a:lstStyle/>
           <a:p>
-            <a:pPr indent="0" marL="0">
-              <a:buNone/>
-            </a:pPr>
-            <a:r>
-              <a:rPr lang="en-US" sz="1200" spc="200" kern="0" dirty="0">
+            <a:pPr marL="0" indent="0">
+              <a:buNone/>
+            </a:pPr>
+            <a:r>
+              <a:rPr lang="en-US" sz="1200" kern="0" spc="200" dirty="0">
                 <a:solidFill>
                   <a:srgbClr val="64748B"/>
                 </a:solidFill>
@@ -4748,7 +4633,7 @@
           <a:bodyPr wrap="square" lIns="0" tIns="0" rIns="0" bIns="0" rtlCol="0" anchor="ctr"/>
           <a:lstStyle/>
           <a:p>
-            <a:pPr indent="0" marL="0">
+            <a:pPr marL="0" indent="0">
               <a:buNone/>
             </a:pPr>
             <a:r>
@@ -4787,13 +4672,20 @@
           </a:solidFill>
           <a:ln/>
           <a:effectLst>
-            <a:outerShdw sx="100000" sy="100000" kx="0" ky="0" algn="bl" rotWithShape="0" blurRad="101600" dist="25400" dir="16200000">
+            <a:outerShdw blurRad="101600" dist="25400" dir="16200000" algn="bl" rotWithShape="0">
               <a:srgbClr val="000000">
                 <a:alpha val="6000"/>
               </a:srgbClr>
             </a:outerShdw>
           </a:effectLst>
         </p:spPr>
+        <p:txBody>
+          <a:bodyPr/>
+          <a:lstStyle/>
+          <a:p>
+            <a:endParaRPr lang="en-US"/>
+          </a:p>
+        </p:txBody>
       </p:sp>
       <p:sp>
         <p:nvSpPr>
@@ -4816,6 +4708,13 @@
           </a:solidFill>
           <a:ln/>
         </p:spPr>
+        <p:txBody>
+          <a:bodyPr/>
+          <a:lstStyle/>
+          <a:p>
+            <a:endParaRPr lang="en-US"/>
+          </a:p>
+        </p:txBody>
       </p:sp>
       <p:sp>
         <p:nvSpPr>
@@ -4838,7 +4737,7 @@
           <a:bodyPr wrap="square" lIns="0" tIns="0" rIns="0" bIns="0" rtlCol="0" anchor="ctr"/>
           <a:lstStyle/>
           <a:p>
-            <a:pPr algn="ctr" indent="0" marL="0">
+            <a:pPr marL="0" indent="0" algn="ctr">
               <a:buNone/>
             </a:pPr>
             <a:r>
@@ -4877,7 +4776,7 @@
           <a:bodyPr wrap="square" lIns="0" tIns="0" rIns="0" bIns="0" rtlCol="0" anchor="ctr"/>
           <a:lstStyle/>
           <a:p>
-            <a:pPr indent="0" marL="0">
+            <a:pPr marL="0" indent="0">
               <a:buNone/>
             </a:pPr>
             <a:r>
@@ -4916,7 +4815,7 @@
           <a:bodyPr wrap="square" lIns="0" tIns="0" rIns="0" bIns="0" rtlCol="0" anchor="ctr"/>
           <a:lstStyle/>
           <a:p>
-            <a:pPr indent="0" marL="0">
+            <a:pPr marL="0" indent="0">
               <a:buNone/>
             </a:pPr>
             <a:r>
@@ -4955,13 +4854,20 @@
           </a:solidFill>
           <a:ln/>
           <a:effectLst>
-            <a:outerShdw sx="100000" sy="100000" kx="0" ky="0" algn="bl" rotWithShape="0" blurRad="101600" dist="25400" dir="16200000">
+            <a:outerShdw blurRad="101600" dist="25400" dir="16200000" algn="bl" rotWithShape="0">
               <a:srgbClr val="000000">
                 <a:alpha val="6000"/>
               </a:srgbClr>
             </a:outerShdw>
           </a:effectLst>
         </p:spPr>
+        <p:txBody>
+          <a:bodyPr/>
+          <a:lstStyle/>
+          <a:p>
+            <a:endParaRPr lang="en-US"/>
+          </a:p>
+        </p:txBody>
       </p:sp>
       <p:sp>
         <p:nvSpPr>
@@ -4984,6 +4890,13 @@
           </a:solidFill>
           <a:ln/>
         </p:spPr>
+        <p:txBody>
+          <a:bodyPr/>
+          <a:lstStyle/>
+          <a:p>
+            <a:endParaRPr lang="en-US"/>
+          </a:p>
+        </p:txBody>
       </p:sp>
       <p:sp>
         <p:nvSpPr>
@@ -5006,7 +4919,7 @@
           <a:bodyPr wrap="square" lIns="0" tIns="0" rIns="0" bIns="0" rtlCol="0" anchor="ctr"/>
           <a:lstStyle/>
           <a:p>
-            <a:pPr algn="ctr" indent="0" marL="0">
+            <a:pPr marL="0" indent="0" algn="ctr">
               <a:buNone/>
             </a:pPr>
             <a:r>
@@ -5045,7 +4958,7 @@
           <a:bodyPr wrap="square" lIns="0" tIns="0" rIns="0" bIns="0" rtlCol="0" anchor="ctr"/>
           <a:lstStyle/>
           <a:p>
-            <a:pPr indent="0" marL="0">
+            <a:pPr marL="0" indent="0">
               <a:buNone/>
             </a:pPr>
             <a:r>
@@ -5084,7 +4997,7 @@
           <a:bodyPr wrap="square" lIns="0" tIns="0" rIns="0" bIns="0" rtlCol="0" anchor="ctr"/>
           <a:lstStyle/>
           <a:p>
-            <a:pPr indent="0" marL="0">
+            <a:pPr marL="0" indent="0">
               <a:buNone/>
             </a:pPr>
             <a:r>
@@ -5123,13 +5036,20 @@
           </a:solidFill>
           <a:ln/>
           <a:effectLst>
-            <a:outerShdw sx="100000" sy="100000" kx="0" ky="0" algn="bl" rotWithShape="0" blurRad="101600" dist="25400" dir="16200000">
+            <a:outerShdw blurRad="101600" dist="25400" dir="16200000" algn="bl" rotWithShape="0">
               <a:srgbClr val="000000">
                 <a:alpha val="6000"/>
               </a:srgbClr>
             </a:outerShdw>
           </a:effectLst>
         </p:spPr>
+        <p:txBody>
+          <a:bodyPr/>
+          <a:lstStyle/>
+          <a:p>
+            <a:endParaRPr lang="en-US"/>
+          </a:p>
+        </p:txBody>
       </p:sp>
       <p:sp>
         <p:nvSpPr>
@@ -5152,6 +5072,13 @@
           </a:solidFill>
           <a:ln/>
         </p:spPr>
+        <p:txBody>
+          <a:bodyPr/>
+          <a:lstStyle/>
+          <a:p>
+            <a:endParaRPr lang="en-US"/>
+          </a:p>
+        </p:txBody>
       </p:sp>
       <p:sp>
         <p:nvSpPr>
@@ -5174,7 +5101,7 @@
           <a:bodyPr wrap="square" lIns="0" tIns="0" rIns="0" bIns="0" rtlCol="0" anchor="ctr"/>
           <a:lstStyle/>
           <a:p>
-            <a:pPr algn="ctr" indent="0" marL="0">
+            <a:pPr marL="0" indent="0" algn="ctr">
               <a:buNone/>
             </a:pPr>
             <a:r>
@@ -5213,7 +5140,7 @@
           <a:bodyPr wrap="square" lIns="0" tIns="0" rIns="0" bIns="0" rtlCol="0" anchor="ctr"/>
           <a:lstStyle/>
           <a:p>
-            <a:pPr indent="0" marL="0">
+            <a:pPr marL="0" indent="0">
               <a:buNone/>
             </a:pPr>
             <a:r>
@@ -5252,7 +5179,7 @@
           <a:bodyPr wrap="square" lIns="0" tIns="0" rIns="0" bIns="0" rtlCol="0" anchor="ctr"/>
           <a:lstStyle/>
           <a:p>
-            <a:pPr indent="0" marL="0">
+            <a:pPr marL="0" indent="0">
               <a:buNone/>
             </a:pPr>
             <a:r>
@@ -5291,13 +5218,20 @@
           </a:solidFill>
           <a:ln/>
           <a:effectLst>
-            <a:outerShdw sx="100000" sy="100000" kx="0" ky="0" algn="bl" rotWithShape="0" blurRad="101600" dist="25400" dir="16200000">
+            <a:outerShdw blurRad="101600" dist="25400" dir="16200000" algn="bl" rotWithShape="0">
               <a:srgbClr val="000000">
                 <a:alpha val="6000"/>
               </a:srgbClr>
             </a:outerShdw>
           </a:effectLst>
         </p:spPr>
+        <p:txBody>
+          <a:bodyPr/>
+          <a:lstStyle/>
+          <a:p>
+            <a:endParaRPr lang="en-US"/>
+          </a:p>
+        </p:txBody>
       </p:sp>
       <p:sp>
         <p:nvSpPr>
@@ -5320,6 +5254,13 @@
           </a:solidFill>
           <a:ln/>
         </p:spPr>
+        <p:txBody>
+          <a:bodyPr/>
+          <a:lstStyle/>
+          <a:p>
+            <a:endParaRPr lang="en-US"/>
+          </a:p>
+        </p:txBody>
       </p:sp>
       <p:sp>
         <p:nvSpPr>
@@ -5342,7 +5283,7 @@
           <a:bodyPr wrap="square" lIns="0" tIns="0" rIns="0" bIns="0" rtlCol="0" anchor="ctr"/>
           <a:lstStyle/>
           <a:p>
-            <a:pPr algn="ctr" indent="0" marL="0">
+            <a:pPr marL="0" indent="0" algn="ctr">
               <a:buNone/>
             </a:pPr>
             <a:r>
@@ -5381,7 +5322,7 @@
           <a:bodyPr wrap="square" lIns="0" tIns="0" rIns="0" bIns="0" rtlCol="0" anchor="ctr"/>
           <a:lstStyle/>
           <a:p>
-            <a:pPr indent="0" marL="0">
+            <a:pPr marL="0" indent="0">
               <a:buNone/>
             </a:pPr>
             <a:r>
@@ -5420,7 +5361,7 @@
           <a:bodyPr wrap="square" lIns="0" tIns="0" rIns="0" bIns="0" rtlCol="0" anchor="ctr"/>
           <a:lstStyle/>
           <a:p>
-            <a:pPr indent="0" marL="0">
+            <a:pPr marL="0" indent="0">
               <a:buNone/>
             </a:pPr>
             <a:r>
@@ -5457,6 +5398,13 @@
           </a:solidFill>
           <a:ln/>
         </p:spPr>
+        <p:txBody>
+          <a:bodyPr/>
+          <a:lstStyle/>
+          <a:p>
+            <a:endParaRPr lang="en-US"/>
+          </a:p>
+        </p:txBody>
       </p:sp>
       <p:sp>
         <p:nvSpPr>
@@ -5479,7 +5427,7 @@
           <a:bodyPr wrap="square" lIns="0" tIns="0" rIns="0" bIns="0" rtlCol="0" anchor="ctr"/>
           <a:lstStyle/>
           <a:p>
-            <a:pPr indent="0" marL="0">
+            <a:pPr marL="0" indent="0">
               <a:buNone/>
             </a:pPr>
             <a:r>
@@ -5518,7 +5466,7 @@
           <a:bodyPr wrap="square" lIns="0" tIns="0" rIns="0" bIns="0" rtlCol="0" anchor="ctr"/>
           <a:lstStyle/>
           <a:p>
-            <a:pPr algn="r" indent="0" marL="0">
+            <a:pPr marL="0" indent="0" algn="r">
               <a:buNone/>
             </a:pPr>
             <a:r>
@@ -5552,6 +5500,7 @@
         <a:solidFill>
           <a:srgbClr val="F8FAFC"/>
         </a:solidFill>
+        <a:effectLst/>
       </p:bgPr>
     </p:bg>
     <p:spTree>
@@ -5589,11 +5538,11 @@
           <a:bodyPr wrap="square" lIns="0" tIns="0" rIns="0" bIns="0" rtlCol="0" anchor="ctr"/>
           <a:lstStyle/>
           <a:p>
-            <a:pPr indent="0" marL="0">
-              <a:buNone/>
-            </a:pPr>
-            <a:r>
-              <a:rPr lang="en-US" sz="1200" spc="200" kern="0" dirty="0">
+            <a:pPr marL="0" indent="0">
+              <a:buNone/>
+            </a:pPr>
+            <a:r>
+              <a:rPr lang="en-US" sz="1200" kern="0" spc="200" dirty="0">
                 <a:solidFill>
                   <a:srgbClr val="64748B"/>
                 </a:solidFill>
@@ -5628,7 +5577,7 @@
           <a:bodyPr wrap="square" lIns="0" tIns="0" rIns="0" bIns="0" rtlCol="0" anchor="ctr"/>
           <a:lstStyle/>
           <a:p>
-            <a:pPr indent="0" marL="0">
+            <a:pPr marL="0" indent="0">
               <a:buNone/>
             </a:pPr>
             <a:r>
@@ -5667,13 +5616,20 @@
           </a:solidFill>
           <a:ln/>
           <a:effectLst>
-            <a:outerShdw sx="100000" sy="100000" kx="0" ky="0" algn="bl" rotWithShape="0" blurRad="101600" dist="25400" dir="16200000">
+            <a:outerShdw blurRad="101600" dist="25400" dir="16200000" algn="bl" rotWithShape="0">
               <a:srgbClr val="000000">
                 <a:alpha val="6000"/>
               </a:srgbClr>
             </a:outerShdw>
           </a:effectLst>
         </p:spPr>
+        <p:txBody>
+          <a:bodyPr/>
+          <a:lstStyle/>
+          <a:p>
+            <a:endParaRPr lang="en-US"/>
+          </a:p>
+        </p:txBody>
       </p:sp>
       <p:sp>
         <p:nvSpPr>
@@ -5696,7 +5652,7 @@
           <a:bodyPr wrap="square" lIns="0" tIns="0" rIns="0" bIns="0" rtlCol="0" anchor="ctr"/>
           <a:lstStyle/>
           <a:p>
-            <a:pPr indent="0" marL="0">
+            <a:pPr marL="0" indent="0">
               <a:buNone/>
             </a:pPr>
             <a:r>
@@ -5735,7 +5691,7 @@
           <a:bodyPr wrap="square" lIns="0" tIns="0" rIns="0" bIns="0" rtlCol="0" anchor="ctr"/>
           <a:lstStyle/>
           <a:p>
-            <a:pPr indent="0" marL="0">
+            <a:pPr marL="0" indent="0">
               <a:buNone/>
             </a:pPr>
             <a:r>
@@ -5774,13 +5730,20 @@
           </a:solidFill>
           <a:ln/>
           <a:effectLst>
-            <a:outerShdw sx="100000" sy="100000" kx="0" ky="0" algn="bl" rotWithShape="0" blurRad="101600" dist="25400" dir="16200000">
+            <a:outerShdw blurRad="101600" dist="25400" dir="16200000" algn="bl" rotWithShape="0">
               <a:srgbClr val="000000">
                 <a:alpha val="6000"/>
               </a:srgbClr>
             </a:outerShdw>
           </a:effectLst>
         </p:spPr>
+        <p:txBody>
+          <a:bodyPr/>
+          <a:lstStyle/>
+          <a:p>
+            <a:endParaRPr lang="en-US"/>
+          </a:p>
+        </p:txBody>
       </p:sp>
       <p:sp>
         <p:nvSpPr>
@@ -5803,7 +5766,7 @@
           <a:bodyPr wrap="square" lIns="0" tIns="0" rIns="0" bIns="0" rtlCol="0" anchor="ctr"/>
           <a:lstStyle/>
           <a:p>
-            <a:pPr indent="0" marL="0">
+            <a:pPr marL="0" indent="0">
               <a:buNone/>
             </a:pPr>
             <a:r>
@@ -5842,7 +5805,7 @@
           <a:bodyPr wrap="square" lIns="0" tIns="0" rIns="0" bIns="0" rtlCol="0" anchor="ctr"/>
           <a:lstStyle/>
           <a:p>
-            <a:pPr indent="0" marL="0">
+            <a:pPr marL="0" indent="0">
               <a:buNone/>
             </a:pPr>
             <a:r>
@@ -5881,13 +5844,20 @@
           </a:solidFill>
           <a:ln/>
           <a:effectLst>
-            <a:outerShdw sx="100000" sy="100000" kx="0" ky="0" algn="bl" rotWithShape="0" blurRad="101600" dist="25400" dir="16200000">
+            <a:outerShdw blurRad="101600" dist="25400" dir="16200000" algn="bl" rotWithShape="0">
               <a:srgbClr val="000000">
                 <a:alpha val="6000"/>
               </a:srgbClr>
             </a:outerShdw>
           </a:effectLst>
         </p:spPr>
+        <p:txBody>
+          <a:bodyPr/>
+          <a:lstStyle/>
+          <a:p>
+            <a:endParaRPr lang="en-US"/>
+          </a:p>
+        </p:txBody>
       </p:sp>
       <p:sp>
         <p:nvSpPr>
@@ -5910,7 +5880,7 @@
           <a:bodyPr wrap="square" lIns="0" tIns="0" rIns="0" bIns="0" rtlCol="0" anchor="ctr"/>
           <a:lstStyle/>
           <a:p>
-            <a:pPr indent="0" marL="0">
+            <a:pPr marL="0" indent="0">
               <a:buNone/>
             </a:pPr>
             <a:r>
@@ -5949,7 +5919,7 @@
           <a:bodyPr wrap="square" lIns="0" tIns="0" rIns="0" bIns="0" rtlCol="0" anchor="ctr"/>
           <a:lstStyle/>
           <a:p>
-            <a:pPr indent="0" marL="0">
+            <a:pPr marL="0" indent="0">
               <a:buNone/>
             </a:pPr>
             <a:r>
@@ -5988,13 +5958,20 @@
           </a:solidFill>
           <a:ln/>
           <a:effectLst>
-            <a:outerShdw sx="100000" sy="100000" kx="0" ky="0" algn="bl" rotWithShape="0" blurRad="101600" dist="25400" dir="16200000">
+            <a:outerShdw blurRad="101600" dist="25400" dir="16200000" algn="bl" rotWithShape="0">
               <a:srgbClr val="000000">
                 <a:alpha val="6000"/>
               </a:srgbClr>
             </a:outerShdw>
           </a:effectLst>
         </p:spPr>
+        <p:txBody>
+          <a:bodyPr/>
+          <a:lstStyle/>
+          <a:p>
+            <a:endParaRPr lang="en-US"/>
+          </a:p>
+        </p:txBody>
       </p:sp>
       <p:sp>
         <p:nvSpPr>
@@ -6017,7 +5994,7 @@
           <a:bodyPr wrap="square" lIns="0" tIns="0" rIns="0" bIns="0" rtlCol="0" anchor="ctr"/>
           <a:lstStyle/>
           <a:p>
-            <a:pPr indent="0" marL="0">
+            <a:pPr marL="0" indent="0">
               <a:buNone/>
             </a:pPr>
             <a:r>
@@ -6056,7 +6033,7 @@
           <a:bodyPr wrap="square" lIns="0" tIns="0" rIns="0" bIns="0" rtlCol="0" anchor="ctr"/>
           <a:lstStyle/>
           <a:p>
-            <a:pPr indent="0" marL="0">
+            <a:pPr marL="0" indent="0">
               <a:buNone/>
             </a:pPr>
             <a:r>
@@ -6093,6 +6070,13 @@
           </a:solidFill>
           <a:ln/>
         </p:spPr>
+        <p:txBody>
+          <a:bodyPr/>
+          <a:lstStyle/>
+          <a:p>
+            <a:endParaRPr lang="en-US"/>
+          </a:p>
+        </p:txBody>
       </p:sp>
       <p:sp>
         <p:nvSpPr>
@@ -6115,7 +6099,7 @@
           <a:bodyPr wrap="square" lIns="0" tIns="0" rIns="0" bIns="0" rtlCol="0" anchor="ctr"/>
           <a:lstStyle/>
           <a:p>
-            <a:pPr indent="0" marL="0">
+            <a:pPr marL="0" indent="0">
               <a:buNone/>
             </a:pPr>
             <a:r>
@@ -6154,7 +6138,7 @@
           <a:bodyPr wrap="square" lIns="0" tIns="0" rIns="0" bIns="0" rtlCol="0" anchor="ctr"/>
           <a:lstStyle/>
           <a:p>
-            <a:pPr algn="r" indent="0" marL="0">
+            <a:pPr marL="0" indent="0" algn="r">
               <a:buNone/>
             </a:pPr>
             <a:r>
@@ -6188,6 +6172,7 @@
         <a:solidFill>
           <a:srgbClr val="F8FAFC"/>
         </a:solidFill>
+        <a:effectLst/>
       </p:bgPr>
     </p:bg>
     <p:spTree>
@@ -6225,11 +6210,11 @@
           <a:bodyPr wrap="square" lIns="0" tIns="0" rIns="0" bIns="0" rtlCol="0" anchor="ctr"/>
           <a:lstStyle/>
           <a:p>
-            <a:pPr indent="0" marL="0">
-              <a:buNone/>
-            </a:pPr>
-            <a:r>
-              <a:rPr lang="en-US" sz="1200" spc="200" kern="0" dirty="0">
+            <a:pPr marL="0" indent="0">
+              <a:buNone/>
+            </a:pPr>
+            <a:r>
+              <a:rPr lang="en-US" sz="1200" kern="0" spc="200" dirty="0">
                 <a:solidFill>
                   <a:srgbClr val="64748B"/>
                 </a:solidFill>
@@ -6264,7 +6249,7 @@
           <a:bodyPr wrap="square" lIns="0" tIns="0" rIns="0" bIns="0" rtlCol="0" anchor="ctr"/>
           <a:lstStyle/>
           <a:p>
-            <a:pPr indent="0" marL="0">
+            <a:pPr marL="0" indent="0">
               <a:buNone/>
             </a:pPr>
             <a:r>
@@ -6303,7 +6288,7 @@
           <a:bodyPr wrap="square" lIns="0" tIns="0" rIns="0" bIns="0" rtlCol="0" anchor="ctr"/>
           <a:lstStyle/>
           <a:p>
-            <a:pPr indent="0" marL="0">
+            <a:pPr marL="0" indent="0">
               <a:buNone/>
             </a:pPr>
             <a:r>
@@ -6342,6 +6327,13 @@
           </a:solidFill>
           <a:ln/>
         </p:spPr>
+        <p:txBody>
+          <a:bodyPr/>
+          <a:lstStyle/>
+          <a:p>
+            <a:endParaRPr lang="en-US"/>
+          </a:p>
+        </p:txBody>
       </p:sp>
       <p:sp>
         <p:nvSpPr>
@@ -6364,7 +6356,7 @@
           <a:bodyPr wrap="square" lIns="0" tIns="0" rIns="0" bIns="0" rtlCol="0" anchor="ctr"/>
           <a:lstStyle/>
           <a:p>
-            <a:pPr indent="0" marL="0">
+            <a:pPr marL="0" indent="0">
               <a:buNone/>
             </a:pPr>
             <a:r>
@@ -6403,7 +6395,7 @@
           <a:bodyPr wrap="square" lIns="0" tIns="0" rIns="0" bIns="0" rtlCol="0" anchor="ctr"/>
           <a:lstStyle/>
           <a:p>
-            <a:pPr indent="0" marL="0">
+            <a:pPr marL="0" indent="0">
               <a:buNone/>
             </a:pPr>
             <a:r>
@@ -6442,6 +6434,13 @@
           </a:solidFill>
           <a:ln/>
         </p:spPr>
+        <p:txBody>
+          <a:bodyPr/>
+          <a:lstStyle/>
+          <a:p>
+            <a:endParaRPr lang="en-US"/>
+          </a:p>
+        </p:txBody>
       </p:sp>
       <p:sp>
         <p:nvSpPr>
@@ -6464,7 +6463,7 @@
           <a:bodyPr wrap="square" lIns="0" tIns="0" rIns="0" bIns="0" rtlCol="0" anchor="ctr"/>
           <a:lstStyle/>
           <a:p>
-            <a:pPr indent="0" marL="0">
+            <a:pPr marL="0" indent="0">
               <a:buNone/>
             </a:pPr>
             <a:r>
@@ -6503,7 +6502,7 @@
           <a:bodyPr wrap="square" lIns="0" tIns="0" rIns="0" bIns="0" rtlCol="0" anchor="ctr"/>
           <a:lstStyle/>
           <a:p>
-            <a:pPr indent="0" marL="0">
+            <a:pPr marL="0" indent="0">
               <a:buNone/>
             </a:pPr>
             <a:r>
@@ -6542,6 +6541,13 @@
           </a:solidFill>
           <a:ln/>
         </p:spPr>
+        <p:txBody>
+          <a:bodyPr/>
+          <a:lstStyle/>
+          <a:p>
+            <a:endParaRPr lang="en-US"/>
+          </a:p>
+        </p:txBody>
       </p:sp>
       <p:sp>
         <p:nvSpPr>
@@ -6564,7 +6570,7 @@
           <a:bodyPr wrap="square" lIns="0" tIns="0" rIns="0" bIns="0" rtlCol="0" anchor="ctr"/>
           <a:lstStyle/>
           <a:p>
-            <a:pPr indent="0" marL="0">
+            <a:pPr marL="0" indent="0">
               <a:buNone/>
             </a:pPr>
             <a:r>
@@ -6603,7 +6609,7 @@
           <a:bodyPr wrap="square" lIns="0" tIns="0" rIns="0" bIns="0" rtlCol="0" anchor="ctr"/>
           <a:lstStyle/>
           <a:p>
-            <a:pPr indent="0" marL="0">
+            <a:pPr marL="0" indent="0">
               <a:buNone/>
             </a:pPr>
             <a:r>
@@ -6642,6 +6648,13 @@
           </a:solidFill>
           <a:ln/>
         </p:spPr>
+        <p:txBody>
+          <a:bodyPr/>
+          <a:lstStyle/>
+          <a:p>
+            <a:endParaRPr lang="en-US"/>
+          </a:p>
+        </p:txBody>
       </p:sp>
       <p:sp>
         <p:nvSpPr>
@@ -6664,7 +6677,7 @@
           <a:bodyPr wrap="square" lIns="0" tIns="0" rIns="0" bIns="0" rtlCol="0" anchor="ctr"/>
           <a:lstStyle/>
           <a:p>
-            <a:pPr indent="0" marL="0">
+            <a:pPr marL="0" indent="0">
               <a:buNone/>
             </a:pPr>
             <a:r>
@@ -6703,7 +6716,7 @@
           <a:bodyPr wrap="square" lIns="0" tIns="0" rIns="0" bIns="0" rtlCol="0" anchor="ctr"/>
           <a:lstStyle/>
           <a:p>
-            <a:pPr indent="0" marL="0">
+            <a:pPr marL="0" indent="0">
               <a:buNone/>
             </a:pPr>
             <a:r>
@@ -6742,7 +6755,7 @@
           <a:bodyPr wrap="square" lIns="0" tIns="0" rIns="0" bIns="0" rtlCol="0" anchor="ctr"/>
           <a:lstStyle/>
           <a:p>
-            <a:pPr indent="0" marL="0">
+            <a:pPr marL="0" indent="0">
               <a:buNone/>
             </a:pPr>
             <a:r>
@@ -6762,7 +6775,7 @@
       </p:sp>
       <p:graphicFrame>
         <p:nvGraphicFramePr>
-          <p:cNvPr id="5" name="Table 0"/>
+          <p:cNvPr id="18" name="Table 0"/>
           <p:cNvGraphicFramePr>
             <a:graphicFrameLocks noGrp="1"/>
           </p:cNvGraphicFramePr>
@@ -6783,12 +6796,48 @@
             <a:tbl>
               <a:tblPr/>
               <a:tblGrid>
-                <a:gridCol w="1828800"/>
-                <a:gridCol w="1828800"/>
-                <a:gridCol w="1828800"/>
-                <a:gridCol w="1920240"/>
-                <a:gridCol w="1828800"/>
-                <a:gridCol w="1828800"/>
+                <a:gridCol w="1828800">
+                  <a:extLst>
+                    <a:ext uri="{9D8B030D-6E8A-4147-A177-3AD203B41FA5}">
+                      <a16:colId xmlns:a16="http://schemas.microsoft.com/office/drawing/2014/main" val="20000"/>
+                    </a:ext>
+                  </a:extLst>
+                </a:gridCol>
+                <a:gridCol w="1828800">
+                  <a:extLst>
+                    <a:ext uri="{9D8B030D-6E8A-4147-A177-3AD203B41FA5}">
+                      <a16:colId xmlns:a16="http://schemas.microsoft.com/office/drawing/2014/main" val="20001"/>
+                    </a:ext>
+                  </a:extLst>
+                </a:gridCol>
+                <a:gridCol w="1828800">
+                  <a:extLst>
+                    <a:ext uri="{9D8B030D-6E8A-4147-A177-3AD203B41FA5}">
+                      <a16:colId xmlns:a16="http://schemas.microsoft.com/office/drawing/2014/main" val="20002"/>
+                    </a:ext>
+                  </a:extLst>
+                </a:gridCol>
+                <a:gridCol w="1920240">
+                  <a:extLst>
+                    <a:ext uri="{9D8B030D-6E8A-4147-A177-3AD203B41FA5}">
+                      <a16:colId xmlns:a16="http://schemas.microsoft.com/office/drawing/2014/main" val="20003"/>
+                    </a:ext>
+                  </a:extLst>
+                </a:gridCol>
+                <a:gridCol w="1828800">
+                  <a:extLst>
+                    <a:ext uri="{9D8B030D-6E8A-4147-A177-3AD203B41FA5}">
+                      <a16:colId xmlns:a16="http://schemas.microsoft.com/office/drawing/2014/main" val="20004"/>
+                    </a:ext>
+                  </a:extLst>
+                </a:gridCol>
+                <a:gridCol w="1828800">
+                  <a:extLst>
+                    <a:ext uri="{9D8B030D-6E8A-4147-A177-3AD203B41FA5}">
+                      <a16:colId xmlns:a16="http://schemas.microsoft.com/office/drawing/2014/main" val="20005"/>
+                    </a:ext>
+                  </a:extLst>
+                </a:gridCol>
               </a:tblGrid>
               <a:tr h="594360">
                 <a:tc>
@@ -6796,7 +6845,7 @@
                     <a:bodyPr/>
                     <a:lstStyle/>
                     <a:p>
-                      <a:pPr algn="ctr" indent="0" marL="0">
+                      <a:pPr marL="0" indent="0" algn="ctr">
                         <a:buNone/>
                       </a:pPr>
                       <a:r>
@@ -6817,7 +6866,7 @@
                       </a:endParaRPr>
                     </a:p>
                   </a:txBody>
-                  <a:tcPr marL="91440" marR="91440" marT="45720" marB="45720" anchor="ctr">
+                  <a:tcPr anchor="ctr">
                     <a:lnL w="6350" cap="flat" cmpd="sng" algn="ctr">
                       <a:solidFill>
                         <a:srgbClr val="E2E8F0"/>
@@ -6864,7 +6913,7 @@
                     <a:bodyPr/>
                     <a:lstStyle/>
                     <a:p>
-                      <a:pPr algn="ctr" indent="0" marL="0">
+                      <a:pPr marL="0" indent="0" algn="ctr">
                         <a:buNone/>
                       </a:pPr>
                       <a:r>
@@ -6885,7 +6934,7 @@
                       </a:endParaRPr>
                     </a:p>
                   </a:txBody>
-                  <a:tcPr marL="91440" marR="91440" marT="45720" marB="45720" anchor="ctr">
+                  <a:tcPr anchor="ctr">
                     <a:lnL w="6350" cap="flat" cmpd="sng" algn="ctr">
                       <a:solidFill>
                         <a:srgbClr val="E2E8F0"/>
@@ -6932,7 +6981,7 @@
                     <a:bodyPr/>
                     <a:lstStyle/>
                     <a:p>
-                      <a:pPr algn="ctr" indent="0" marL="0">
+                      <a:pPr marL="0" indent="0" algn="ctr">
                         <a:buNone/>
                       </a:pPr>
                       <a:r>
@@ -6953,7 +7002,7 @@
                       </a:endParaRPr>
                     </a:p>
                   </a:txBody>
-                  <a:tcPr marL="91440" marR="91440" marT="45720" marB="45720" anchor="ctr">
+                  <a:tcPr anchor="ctr">
                     <a:lnL w="6350" cap="flat" cmpd="sng" algn="ctr">
                       <a:solidFill>
                         <a:srgbClr val="E2E8F0"/>
@@ -7000,7 +7049,7 @@
                     <a:bodyPr/>
                     <a:lstStyle/>
                     <a:p>
-                      <a:pPr algn="ctr" indent="0" marL="0">
+                      <a:pPr marL="0" indent="0" algn="ctr">
                         <a:buNone/>
                       </a:pPr>
                       <a:r>
@@ -7021,7 +7070,7 @@
                       </a:endParaRPr>
                     </a:p>
                   </a:txBody>
-                  <a:tcPr marL="91440" marR="91440" marT="45720" marB="45720" anchor="ctr">
+                  <a:tcPr anchor="ctr">
                     <a:lnL w="6350" cap="flat" cmpd="sng" algn="ctr">
                       <a:solidFill>
                         <a:srgbClr val="E2E8F0"/>
@@ -7068,7 +7117,7 @@
                     <a:bodyPr/>
                     <a:lstStyle/>
                     <a:p>
-                      <a:pPr algn="ctr" indent="0" marL="0">
+                      <a:pPr marL="0" indent="0" algn="ctr">
                         <a:buNone/>
                       </a:pPr>
                       <a:r>
@@ -7089,7 +7138,7 @@
                       </a:endParaRPr>
                     </a:p>
                   </a:txBody>
-                  <a:tcPr marL="91440" marR="91440" marT="45720" marB="45720" anchor="ctr">
+                  <a:tcPr anchor="ctr">
                     <a:lnL w="6350" cap="flat" cmpd="sng" algn="ctr">
                       <a:solidFill>
                         <a:srgbClr val="E2E8F0"/>
@@ -7136,7 +7185,7 @@
                     <a:bodyPr/>
                     <a:lstStyle/>
                     <a:p>
-                      <a:pPr algn="ctr" indent="0" marL="0">
+                      <a:pPr marL="0" indent="0" algn="ctr">
                         <a:buNone/>
                       </a:pPr>
                       <a:r>
@@ -7157,7 +7206,7 @@
                       </a:endParaRPr>
                     </a:p>
                   </a:txBody>
-                  <a:tcPr marL="91440" marR="91440" marT="45720" marB="45720" anchor="ctr">
+                  <a:tcPr anchor="ctr">
                     <a:lnL w="6350" cap="flat" cmpd="sng" algn="ctr">
                       <a:solidFill>
                         <a:srgbClr val="E2E8F0"/>
@@ -7199,6 +7248,11 @@
                     </a:solidFill>
                   </a:tcPr>
                 </a:tc>
+                <a:extLst>
+                  <a:ext uri="{0D108BD9-81ED-4DB2-BD59-A6C34878D82A}">
+                    <a16:rowId xmlns:a16="http://schemas.microsoft.com/office/drawing/2014/main" val="10000"/>
+                  </a:ext>
+                </a:extLst>
               </a:tr>
               <a:tr h="594360">
                 <a:tc>
@@ -7206,7 +7260,7 @@
                     <a:bodyPr/>
                     <a:lstStyle/>
                     <a:p>
-                      <a:pPr algn="ctr" indent="0" marL="0">
+                      <a:pPr marL="0" indent="0" algn="ctr">
                         <a:buNone/>
                       </a:pPr>
                       <a:r>
@@ -7227,7 +7281,7 @@
                       </a:endParaRPr>
                     </a:p>
                   </a:txBody>
-                  <a:tcPr marL="91440" marR="91440" marT="45720" marB="45720" anchor="ctr">
+                  <a:tcPr anchor="ctr">
                     <a:lnL w="6350" cap="flat" cmpd="sng" algn="ctr">
                       <a:solidFill>
                         <a:srgbClr val="E2E8F0"/>
@@ -7271,7 +7325,7 @@
                     <a:bodyPr/>
                     <a:lstStyle/>
                     <a:p>
-                      <a:pPr algn="ctr" indent="0" marL="0">
+                      <a:pPr marL="0" indent="0" algn="ctr">
                         <a:buNone/>
                       </a:pPr>
                       <a:r>
@@ -7292,7 +7346,7 @@
                       </a:endParaRPr>
                     </a:p>
                   </a:txBody>
-                  <a:tcPr marL="91440" marR="91440" marT="45720" marB="45720" anchor="ctr">
+                  <a:tcPr anchor="ctr">
                     <a:lnL w="6350" cap="flat" cmpd="sng" algn="ctr">
                       <a:solidFill>
                         <a:srgbClr val="E2E8F0"/>
@@ -7336,7 +7390,7 @@
                     <a:bodyPr/>
                     <a:lstStyle/>
                     <a:p>
-                      <a:pPr algn="ctr" indent="0" marL="0">
+                      <a:pPr marL="0" indent="0" algn="ctr">
                         <a:buNone/>
                       </a:pPr>
                       <a:r>
@@ -7357,7 +7411,7 @@
                       </a:endParaRPr>
                     </a:p>
                   </a:txBody>
-                  <a:tcPr marL="91440" marR="91440" marT="45720" marB="45720" anchor="ctr">
+                  <a:tcPr anchor="ctr">
                     <a:lnL w="6350" cap="flat" cmpd="sng" algn="ctr">
                       <a:solidFill>
                         <a:srgbClr val="E2E8F0"/>
@@ -7401,7 +7455,7 @@
                     <a:bodyPr/>
                     <a:lstStyle/>
                     <a:p>
-                      <a:pPr algn="ctr" indent="0" marL="0">
+                      <a:pPr marL="0" indent="0" algn="ctr">
                         <a:buNone/>
                       </a:pPr>
                       <a:r>
@@ -7422,7 +7476,7 @@
                       </a:endParaRPr>
                     </a:p>
                   </a:txBody>
-                  <a:tcPr marL="91440" marR="91440" marT="45720" marB="45720" anchor="ctr">
+                  <a:tcPr anchor="ctr">
                     <a:lnL w="6350" cap="flat" cmpd="sng" algn="ctr">
                       <a:solidFill>
                         <a:srgbClr val="E2E8F0"/>
@@ -7466,7 +7520,7 @@
                     <a:bodyPr/>
                     <a:lstStyle/>
                     <a:p>
-                      <a:pPr algn="ctr" indent="0" marL="0">
+                      <a:pPr marL="0" indent="0" algn="ctr">
                         <a:buNone/>
                       </a:pPr>
                       <a:r>
@@ -7487,7 +7541,7 @@
                       </a:endParaRPr>
                     </a:p>
                   </a:txBody>
-                  <a:tcPr marL="91440" marR="91440" marT="45720" marB="45720" anchor="ctr">
+                  <a:tcPr anchor="ctr">
                     <a:lnL w="6350" cap="flat" cmpd="sng" algn="ctr">
                       <a:solidFill>
                         <a:srgbClr val="E2E8F0"/>
@@ -7531,7 +7585,7 @@
                     <a:bodyPr/>
                     <a:lstStyle/>
                     <a:p>
-                      <a:pPr algn="ctr" indent="0" marL="0">
+                      <a:pPr marL="0" indent="0" algn="ctr">
                         <a:buNone/>
                       </a:pPr>
                       <a:r>
@@ -7552,7 +7606,7 @@
                       </a:endParaRPr>
                     </a:p>
                   </a:txBody>
-                  <a:tcPr marL="91440" marR="91440" marT="45720" marB="45720" anchor="ctr">
+                  <a:tcPr anchor="ctr">
                     <a:lnL w="6350" cap="flat" cmpd="sng" algn="ctr">
                       <a:solidFill>
                         <a:srgbClr val="E2E8F0"/>
@@ -7591,6 +7645,11 @@
                     </a:lnB>
                   </a:tcPr>
                 </a:tc>
+                <a:extLst>
+                  <a:ext uri="{0D108BD9-81ED-4DB2-BD59-A6C34878D82A}">
+                    <a16:rowId xmlns:a16="http://schemas.microsoft.com/office/drawing/2014/main" val="10001"/>
+                  </a:ext>
+                </a:extLst>
               </a:tr>
             </a:tbl>
           </a:graphicData>
@@ -7615,6 +7674,13 @@
           </a:solidFill>
           <a:ln/>
         </p:spPr>
+        <p:txBody>
+          <a:bodyPr/>
+          <a:lstStyle/>
+          <a:p>
+            <a:endParaRPr lang="en-US"/>
+          </a:p>
+        </p:txBody>
       </p:sp>
       <p:sp>
         <p:nvSpPr>
@@ -7637,7 +7703,7 @@
           <a:bodyPr wrap="square" lIns="0" tIns="0" rIns="0" bIns="0" rtlCol="0" anchor="ctr"/>
           <a:lstStyle/>
           <a:p>
-            <a:pPr indent="0" marL="0">
+            <a:pPr marL="0" indent="0">
               <a:buNone/>
             </a:pPr>
             <a:r>
@@ -7676,7 +7742,7 @@
           <a:bodyPr wrap="square" lIns="0" tIns="0" rIns="0" bIns="0" rtlCol="0" anchor="ctr"/>
           <a:lstStyle/>
           <a:p>
-            <a:pPr algn="r" indent="0" marL="0">
+            <a:pPr marL="0" indent="0" algn="r">
               <a:buNone/>
             </a:pPr>
             <a:r>
@@ -7710,6 +7776,7 @@
         <a:solidFill>
           <a:srgbClr val="F8FAFC"/>
         </a:solidFill>
+        <a:effectLst/>
       </p:bgPr>
     </p:bg>
     <p:spTree>
@@ -7747,11 +7814,11 @@
           <a:bodyPr wrap="square" lIns="0" tIns="0" rIns="0" bIns="0" rtlCol="0" anchor="ctr"/>
           <a:lstStyle/>
           <a:p>
-            <a:pPr indent="0" marL="0">
-              <a:buNone/>
-            </a:pPr>
-            <a:r>
-              <a:rPr lang="en-US" sz="1200" spc="200" kern="0" dirty="0">
+            <a:pPr marL="0" indent="0">
+              <a:buNone/>
+            </a:pPr>
+            <a:r>
+              <a:rPr lang="en-US" sz="1200" kern="0" spc="200" dirty="0">
                 <a:solidFill>
                   <a:srgbClr val="64748B"/>
                 </a:solidFill>
@@ -7786,7 +7853,7 @@
           <a:bodyPr wrap="square" lIns="0" tIns="0" rIns="0" bIns="0" rtlCol="0" anchor="ctr"/>
           <a:lstStyle/>
           <a:p>
-            <a:pPr indent="0" marL="0">
+            <a:pPr marL="0" indent="0">
               <a:buNone/>
             </a:pPr>
             <a:r>
@@ -7803,7 +7870,7 @@
             <a:endParaRPr lang="en-US" sz="2400" dirty="0"/>
           </a:p>
           <a:p>
-            <a:pPr indent="0" marL="0">
+            <a:pPr marL="0" indent="0">
               <a:buNone/>
             </a:pPr>
             <a:r>
@@ -7842,7 +7909,7 @@
           <a:bodyPr wrap="square" lIns="0" tIns="0" rIns="0" bIns="0" rtlCol="0" anchor="ctr"/>
           <a:lstStyle/>
           <a:p>
-            <a:pPr indent="0" marL="0">
+            <a:pPr marL="0" indent="0">
               <a:buNone/>
             </a:pPr>
             <a:r>
@@ -7879,6 +7946,13 @@
           </a:solidFill>
           <a:ln/>
         </p:spPr>
+        <p:txBody>
+          <a:bodyPr/>
+          <a:lstStyle/>
+          <a:p>
+            <a:endParaRPr lang="en-US"/>
+          </a:p>
+        </p:txBody>
       </p:sp>
       <p:sp>
         <p:nvSpPr>
@@ -7901,7 +7975,7 @@
           <a:bodyPr wrap="square" lIns="0" tIns="0" rIns="0" bIns="0" rtlCol="0" anchor="ctr"/>
           <a:lstStyle/>
           <a:p>
-            <a:pPr algn="ctr" indent="0" marL="0">
+            <a:pPr marL="0" indent="0" algn="ctr">
               <a:buNone/>
             </a:pPr>
             <a:r>
@@ -7940,7 +8014,7 @@
           <a:bodyPr wrap="square" lIns="0" tIns="0" rIns="0" bIns="0" rtlCol="0" anchor="ctr"/>
           <a:lstStyle/>
           <a:p>
-            <a:pPr indent="0" marL="0">
+            <a:pPr marL="0" indent="0">
               <a:buNone/>
             </a:pPr>
             <a:r>
@@ -7979,7 +8053,7 @@
           <a:bodyPr wrap="square" lIns="0" tIns="0" rIns="0" bIns="0" rtlCol="0" anchor="ctr"/>
           <a:lstStyle/>
           <a:p>
-            <a:pPr indent="0" marL="0">
+            <a:pPr marL="0" indent="0">
               <a:buNone/>
             </a:pPr>
             <a:r>
@@ -8016,6 +8090,13 @@
           </a:solidFill>
           <a:ln/>
         </p:spPr>
+        <p:txBody>
+          <a:bodyPr/>
+          <a:lstStyle/>
+          <a:p>
+            <a:endParaRPr lang="en-US"/>
+          </a:p>
+        </p:txBody>
       </p:sp>
       <p:sp>
         <p:nvSpPr>
@@ -8038,7 +8119,7 @@
           <a:bodyPr wrap="square" lIns="0" tIns="0" rIns="0" bIns="0" rtlCol="0" anchor="ctr"/>
           <a:lstStyle/>
           <a:p>
-            <a:pPr algn="ctr" indent="0" marL="0">
+            <a:pPr marL="0" indent="0" algn="ctr">
               <a:buNone/>
             </a:pPr>
             <a:r>
@@ -8077,7 +8158,7 @@
           <a:bodyPr wrap="square" lIns="0" tIns="0" rIns="0" bIns="0" rtlCol="0" anchor="ctr"/>
           <a:lstStyle/>
           <a:p>
-            <a:pPr indent="0" marL="0">
+            <a:pPr marL="0" indent="0">
               <a:buNone/>
             </a:pPr>
             <a:r>
@@ -8116,7 +8197,7 @@
           <a:bodyPr wrap="square" lIns="0" tIns="0" rIns="0" bIns="0" rtlCol="0" anchor="ctr"/>
           <a:lstStyle/>
           <a:p>
-            <a:pPr indent="0" marL="0">
+            <a:pPr marL="0" indent="0">
               <a:buNone/>
             </a:pPr>
             <a:r>
@@ -8153,6 +8234,13 @@
           </a:solidFill>
           <a:ln/>
         </p:spPr>
+        <p:txBody>
+          <a:bodyPr/>
+          <a:lstStyle/>
+          <a:p>
+            <a:endParaRPr lang="en-US"/>
+          </a:p>
+        </p:txBody>
       </p:sp>
       <p:sp>
         <p:nvSpPr>
@@ -8175,7 +8263,7 @@
           <a:bodyPr wrap="square" lIns="0" tIns="0" rIns="0" bIns="0" rtlCol="0" anchor="ctr"/>
           <a:lstStyle/>
           <a:p>
-            <a:pPr algn="ctr" indent="0" marL="0">
+            <a:pPr marL="0" indent="0" algn="ctr">
               <a:buNone/>
             </a:pPr>
             <a:r>
@@ -8214,7 +8302,7 @@
           <a:bodyPr wrap="square" lIns="0" tIns="0" rIns="0" bIns="0" rtlCol="0" anchor="ctr"/>
           <a:lstStyle/>
           <a:p>
-            <a:pPr indent="0" marL="0">
+            <a:pPr marL="0" indent="0">
               <a:buNone/>
             </a:pPr>
             <a:r>
@@ -8253,7 +8341,7 @@
           <a:bodyPr wrap="square" lIns="0" tIns="0" rIns="0" bIns="0" rtlCol="0" anchor="ctr"/>
           <a:lstStyle/>
           <a:p>
-            <a:pPr indent="0" marL="0">
+            <a:pPr marL="0" indent="0">
               <a:buNone/>
             </a:pPr>
             <a:r>
@@ -8290,6 +8378,13 @@
           </a:solidFill>
           <a:ln/>
         </p:spPr>
+        <p:txBody>
+          <a:bodyPr/>
+          <a:lstStyle/>
+          <a:p>
+            <a:endParaRPr lang="en-US"/>
+          </a:p>
+        </p:txBody>
       </p:sp>
       <p:sp>
         <p:nvSpPr>
@@ -8312,7 +8407,7 @@
           <a:bodyPr wrap="square" lIns="0" tIns="0" rIns="0" bIns="0" rtlCol="0" anchor="ctr"/>
           <a:lstStyle/>
           <a:p>
-            <a:pPr algn="ctr" indent="0" marL="0">
+            <a:pPr marL="0" indent="0" algn="ctr">
               <a:buNone/>
             </a:pPr>
             <a:r>
@@ -8351,7 +8446,7 @@
           <a:bodyPr wrap="square" lIns="0" tIns="0" rIns="0" bIns="0" rtlCol="0" anchor="ctr"/>
           <a:lstStyle/>
           <a:p>
-            <a:pPr indent="0" marL="0">
+            <a:pPr marL="0" indent="0">
               <a:buNone/>
             </a:pPr>
             <a:r>
@@ -8390,7 +8485,7 @@
           <a:bodyPr wrap="square" lIns="0" tIns="0" rIns="0" bIns="0" rtlCol="0" anchor="ctr"/>
           <a:lstStyle/>
           <a:p>
-            <a:pPr indent="0" marL="0">
+            <a:pPr marL="0" indent="0">
               <a:buNone/>
             </a:pPr>
             <a:r>
@@ -8427,6 +8522,13 @@
           </a:solidFill>
           <a:ln/>
         </p:spPr>
+        <p:txBody>
+          <a:bodyPr/>
+          <a:lstStyle/>
+          <a:p>
+            <a:endParaRPr lang="en-US"/>
+          </a:p>
+        </p:txBody>
       </p:sp>
       <p:sp>
         <p:nvSpPr>
@@ -8449,7 +8551,7 @@
           <a:bodyPr wrap="square" lIns="0" tIns="0" rIns="0" bIns="0" rtlCol="0" anchor="ctr"/>
           <a:lstStyle/>
           <a:p>
-            <a:pPr algn="ctr" indent="0" marL="0">
+            <a:pPr marL="0" indent="0" algn="ctr">
               <a:buNone/>
             </a:pPr>
             <a:r>
@@ -8488,7 +8590,7 @@
           <a:bodyPr wrap="square" lIns="0" tIns="0" rIns="0" bIns="0" rtlCol="0" anchor="ctr"/>
           <a:lstStyle/>
           <a:p>
-            <a:pPr indent="0" marL="0">
+            <a:pPr marL="0" indent="0">
               <a:buNone/>
             </a:pPr>
             <a:r>
@@ -8527,7 +8629,7 @@
           <a:bodyPr wrap="square" lIns="0" tIns="0" rIns="0" bIns="0" rtlCol="0" anchor="ctr"/>
           <a:lstStyle/>
           <a:p>
-            <a:pPr indent="0" marL="0">
+            <a:pPr marL="0" indent="0">
               <a:buNone/>
             </a:pPr>
             <a:r>
@@ -8564,6 +8666,13 @@
           </a:solidFill>
           <a:ln/>
         </p:spPr>
+        <p:txBody>
+          <a:bodyPr/>
+          <a:lstStyle/>
+          <a:p>
+            <a:endParaRPr lang="en-US"/>
+          </a:p>
+        </p:txBody>
       </p:sp>
       <p:sp>
         <p:nvSpPr>
@@ -8586,7 +8695,7 @@
           <a:bodyPr wrap="square" lIns="0" tIns="0" rIns="0" bIns="0" rtlCol="0" anchor="ctr"/>
           <a:lstStyle/>
           <a:p>
-            <a:pPr indent="0" marL="0">
+            <a:pPr marL="0" indent="0">
               <a:buNone/>
             </a:pPr>
             <a:r>
@@ -8625,7 +8734,7 @@
           <a:bodyPr wrap="square" lIns="0" tIns="0" rIns="0" bIns="0" rtlCol="0" anchor="ctr"/>
           <a:lstStyle/>
           <a:p>
-            <a:pPr algn="r" indent="0" marL="0">
+            <a:pPr marL="0" indent="0" algn="r">
               <a:buNone/>
             </a:pPr>
             <a:r>
@@ -8659,6 +8768,7 @@
         <a:solidFill>
           <a:srgbClr val="F8FAFC"/>
         </a:solidFill>
+        <a:effectLst/>
       </p:bgPr>
     </p:bg>
     <p:spTree>
@@ -8696,11 +8806,11 @@
           <a:bodyPr wrap="square" lIns="0" tIns="0" rIns="0" bIns="0" rtlCol="0" anchor="ctr"/>
           <a:lstStyle/>
           <a:p>
-            <a:pPr indent="0" marL="0">
-              <a:buNone/>
-            </a:pPr>
-            <a:r>
-              <a:rPr lang="en-US" sz="1200" spc="200" kern="0" dirty="0">
+            <a:pPr marL="0" indent="0">
+              <a:buNone/>
+            </a:pPr>
+            <a:r>
+              <a:rPr lang="en-US" sz="1200" kern="0" spc="200" dirty="0">
                 <a:solidFill>
                   <a:srgbClr val="64748B"/>
                 </a:solidFill>
@@ -8735,7 +8845,7 @@
           <a:bodyPr wrap="square" lIns="0" tIns="0" rIns="0" bIns="0" rtlCol="0" anchor="ctr"/>
           <a:lstStyle/>
           <a:p>
-            <a:pPr indent="0" marL="0">
+            <a:pPr marL="0" indent="0">
               <a:buNone/>
             </a:pPr>
             <a:r>
@@ -8774,13 +8884,20 @@
           </a:solidFill>
           <a:ln/>
           <a:effectLst>
-            <a:outerShdw sx="100000" sy="100000" kx="0" ky="0" algn="bl" rotWithShape="0" blurRad="76200" dist="12700" dir="16200000">
+            <a:outerShdw blurRad="76200" dist="12700" dir="16200000" algn="bl" rotWithShape="0">
               <a:srgbClr val="000000">
                 <a:alpha val="5000"/>
               </a:srgbClr>
             </a:outerShdw>
           </a:effectLst>
         </p:spPr>
+        <p:txBody>
+          <a:bodyPr/>
+          <a:lstStyle/>
+          <a:p>
+            <a:endParaRPr lang="en-US"/>
+          </a:p>
+        </p:txBody>
       </p:sp>
       <p:sp>
         <p:nvSpPr>
@@ -8803,7 +8920,7 @@
           <a:bodyPr wrap="square" lIns="0" tIns="0" rIns="0" bIns="0" rtlCol="0" anchor="ctr"/>
           <a:lstStyle/>
           <a:p>
-            <a:pPr indent="0" marL="0">
+            <a:pPr marL="0" indent="0">
               <a:buNone/>
             </a:pPr>
             <a:r>
@@ -8842,7 +8959,7 @@
           <a:bodyPr wrap="square" lIns="0" tIns="0" rIns="0" bIns="0" rtlCol="0" anchor="ctr"/>
           <a:lstStyle/>
           <a:p>
-            <a:pPr indent="0" marL="0">
+            <a:pPr marL="0" indent="0">
               <a:buNone/>
             </a:pPr>
             <a:r>
@@ -8881,7 +8998,7 @@
           <a:bodyPr wrap="square" lIns="0" tIns="0" rIns="0" bIns="0" rtlCol="0" anchor="ctr"/>
           <a:lstStyle/>
           <a:p>
-            <a:pPr indent="0" marL="0">
+            <a:pPr marL="0" indent="0">
               <a:buNone/>
             </a:pPr>
             <a:r>
@@ -8920,6 +9037,13 @@
           </a:solidFill>
           <a:ln/>
         </p:spPr>
+        <p:txBody>
+          <a:bodyPr/>
+          <a:lstStyle/>
+          <a:p>
+            <a:endParaRPr lang="en-US"/>
+          </a:p>
+        </p:txBody>
       </p:sp>
       <p:sp>
         <p:nvSpPr>
@@ -8942,7 +9066,7 @@
           <a:bodyPr wrap="square" lIns="0" tIns="0" rIns="0" bIns="0" rtlCol="0" anchor="ctr"/>
           <a:lstStyle/>
           <a:p>
-            <a:pPr algn="ctr" indent="0" marL="0">
+            <a:pPr marL="0" indent="0" algn="ctr">
               <a:buNone/>
             </a:pPr>
             <a:r>
@@ -8981,13 +9105,20 @@
           </a:solidFill>
           <a:ln/>
           <a:effectLst>
-            <a:outerShdw sx="100000" sy="100000" kx="0" ky="0" algn="bl" rotWithShape="0" blurRad="76200" dist="12700" dir="16200000">
+            <a:outerShdw blurRad="76200" dist="12700" dir="16200000" algn="bl" rotWithShape="0">
               <a:srgbClr val="000000">
                 <a:alpha val="5000"/>
               </a:srgbClr>
             </a:outerShdw>
           </a:effectLst>
         </p:spPr>
+        <p:txBody>
+          <a:bodyPr/>
+          <a:lstStyle/>
+          <a:p>
+            <a:endParaRPr lang="en-US"/>
+          </a:p>
+        </p:txBody>
       </p:sp>
       <p:sp>
         <p:nvSpPr>
@@ -9010,7 +9141,7 @@
           <a:bodyPr wrap="square" lIns="0" tIns="0" rIns="0" bIns="0" rtlCol="0" anchor="ctr"/>
           <a:lstStyle/>
           <a:p>
-            <a:pPr indent="0" marL="0">
+            <a:pPr marL="0" indent="0">
               <a:buNone/>
             </a:pPr>
             <a:r>
@@ -9049,7 +9180,7 @@
           <a:bodyPr wrap="square" lIns="0" tIns="0" rIns="0" bIns="0" rtlCol="0" anchor="ctr"/>
           <a:lstStyle/>
           <a:p>
-            <a:pPr indent="0" marL="0">
+            <a:pPr marL="0" indent="0">
               <a:buNone/>
             </a:pPr>
             <a:r>
@@ -9088,7 +9219,7 @@
           <a:bodyPr wrap="square" lIns="0" tIns="0" rIns="0" bIns="0" rtlCol="0" anchor="ctr"/>
           <a:lstStyle/>
           <a:p>
-            <a:pPr indent="0" marL="0">
+            <a:pPr marL="0" indent="0">
               <a:buNone/>
             </a:pPr>
             <a:r>
@@ -9127,6 +9258,13 @@
           </a:solidFill>
           <a:ln/>
         </p:spPr>
+        <p:txBody>
+          <a:bodyPr/>
+          <a:lstStyle/>
+          <a:p>
+            <a:endParaRPr lang="en-US"/>
+          </a:p>
+        </p:txBody>
       </p:sp>
       <p:sp>
         <p:nvSpPr>
@@ -9149,7 +9287,7 @@
           <a:bodyPr wrap="square" lIns="0" tIns="0" rIns="0" bIns="0" rtlCol="0" anchor="ctr"/>
           <a:lstStyle/>
           <a:p>
-            <a:pPr algn="ctr" indent="0" marL="0">
+            <a:pPr marL="0" indent="0" algn="ctr">
               <a:buNone/>
             </a:pPr>
             <a:r>
@@ -9188,13 +9326,20 @@
           </a:solidFill>
           <a:ln/>
           <a:effectLst>
-            <a:outerShdw sx="100000" sy="100000" kx="0" ky="0" algn="bl" rotWithShape="0" blurRad="76200" dist="12700" dir="16200000">
+            <a:outerShdw blurRad="76200" dist="12700" dir="16200000" algn="bl" rotWithShape="0">
               <a:srgbClr val="000000">
                 <a:alpha val="5000"/>
               </a:srgbClr>
             </a:outerShdw>
           </a:effectLst>
         </p:spPr>
+        <p:txBody>
+          <a:bodyPr/>
+          <a:lstStyle/>
+          <a:p>
+            <a:endParaRPr lang="en-US"/>
+          </a:p>
+        </p:txBody>
       </p:sp>
       <p:sp>
         <p:nvSpPr>
@@ -9217,7 +9362,7 @@
           <a:bodyPr wrap="square" lIns="0" tIns="0" rIns="0" bIns="0" rtlCol="0" anchor="ctr"/>
           <a:lstStyle/>
           <a:p>
-            <a:pPr indent="0" marL="0">
+            <a:pPr marL="0" indent="0">
               <a:buNone/>
             </a:pPr>
             <a:r>
@@ -9256,7 +9401,7 @@
           <a:bodyPr wrap="square" lIns="0" tIns="0" rIns="0" bIns="0" rtlCol="0" anchor="ctr"/>
           <a:lstStyle/>
           <a:p>
-            <a:pPr indent="0" marL="0">
+            <a:pPr marL="0" indent="0">
               <a:buNone/>
             </a:pPr>
             <a:r>
@@ -9295,7 +9440,7 @@
           <a:bodyPr wrap="square" lIns="0" tIns="0" rIns="0" bIns="0" rtlCol="0" anchor="ctr"/>
           <a:lstStyle/>
           <a:p>
-            <a:pPr indent="0" marL="0">
+            <a:pPr marL="0" indent="0">
               <a:buNone/>
             </a:pPr>
             <a:r>
@@ -9334,6 +9479,13 @@
           </a:solidFill>
           <a:ln/>
         </p:spPr>
+        <p:txBody>
+          <a:bodyPr/>
+          <a:lstStyle/>
+          <a:p>
+            <a:endParaRPr lang="en-US"/>
+          </a:p>
+        </p:txBody>
       </p:sp>
       <p:sp>
         <p:nvSpPr>
@@ -9356,7 +9508,7 @@
           <a:bodyPr wrap="square" lIns="0" tIns="0" rIns="0" bIns="0" rtlCol="0" anchor="ctr"/>
           <a:lstStyle/>
           <a:p>
-            <a:pPr algn="ctr" indent="0" marL="0">
+            <a:pPr marL="0" indent="0" algn="ctr">
               <a:buNone/>
             </a:pPr>
             <a:r>
@@ -9395,13 +9547,20 @@
           </a:solidFill>
           <a:ln/>
           <a:effectLst>
-            <a:outerShdw sx="100000" sy="100000" kx="0" ky="0" algn="bl" rotWithShape="0" blurRad="76200" dist="12700" dir="16200000">
+            <a:outerShdw blurRad="76200" dist="12700" dir="16200000" algn="bl" rotWithShape="0">
               <a:srgbClr val="000000">
                 <a:alpha val="5000"/>
               </a:srgbClr>
             </a:outerShdw>
           </a:effectLst>
         </p:spPr>
+        <p:txBody>
+          <a:bodyPr/>
+          <a:lstStyle/>
+          <a:p>
+            <a:endParaRPr lang="en-US"/>
+          </a:p>
+        </p:txBody>
       </p:sp>
       <p:sp>
         <p:nvSpPr>
@@ -9424,7 +9583,7 @@
           <a:bodyPr wrap="square" lIns="0" tIns="0" rIns="0" bIns="0" rtlCol="0" anchor="ctr"/>
           <a:lstStyle/>
           <a:p>
-            <a:pPr indent="0" marL="0">
+            <a:pPr marL="0" indent="0">
               <a:buNone/>
             </a:pPr>
             <a:r>
@@ -9463,7 +9622,7 @@
           <a:bodyPr wrap="square" lIns="0" tIns="0" rIns="0" bIns="0" rtlCol="0" anchor="ctr"/>
           <a:lstStyle/>
           <a:p>
-            <a:pPr indent="0" marL="0">
+            <a:pPr marL="0" indent="0">
               <a:buNone/>
             </a:pPr>
             <a:r>
@@ -9502,7 +9661,7 @@
           <a:bodyPr wrap="square" lIns="0" tIns="0" rIns="0" bIns="0" rtlCol="0" anchor="ctr"/>
           <a:lstStyle/>
           <a:p>
-            <a:pPr indent="0" marL="0">
+            <a:pPr marL="0" indent="0">
               <a:buNone/>
             </a:pPr>
             <a:r>
@@ -9541,6 +9700,13 @@
           </a:solidFill>
           <a:ln/>
         </p:spPr>
+        <p:txBody>
+          <a:bodyPr/>
+          <a:lstStyle/>
+          <a:p>
+            <a:endParaRPr lang="en-US"/>
+          </a:p>
+        </p:txBody>
       </p:sp>
       <p:sp>
         <p:nvSpPr>
@@ -9563,7 +9729,7 @@
           <a:bodyPr wrap="square" lIns="0" tIns="0" rIns="0" bIns="0" rtlCol="0" anchor="ctr"/>
           <a:lstStyle/>
           <a:p>
-            <a:pPr algn="ctr" indent="0" marL="0">
+            <a:pPr marL="0" indent="0" algn="ctr">
               <a:buNone/>
             </a:pPr>
             <a:r>
@@ -9602,13 +9768,20 @@
           </a:solidFill>
           <a:ln/>
           <a:effectLst>
-            <a:outerShdw sx="100000" sy="100000" kx="0" ky="0" algn="bl" rotWithShape="0" blurRad="76200" dist="12700" dir="16200000">
+            <a:outerShdw blurRad="76200" dist="12700" dir="16200000" algn="bl" rotWithShape="0">
               <a:srgbClr val="000000">
                 <a:alpha val="5000"/>
               </a:srgbClr>
             </a:outerShdw>
           </a:effectLst>
         </p:spPr>
+        <p:txBody>
+          <a:bodyPr/>
+          <a:lstStyle/>
+          <a:p>
+            <a:endParaRPr lang="en-US"/>
+          </a:p>
+        </p:txBody>
       </p:sp>
       <p:sp>
         <p:nvSpPr>
@@ -9631,7 +9804,7 @@
           <a:bodyPr wrap="square" lIns="0" tIns="0" rIns="0" bIns="0" rtlCol="0" anchor="ctr"/>
           <a:lstStyle/>
           <a:p>
-            <a:pPr indent="0" marL="0">
+            <a:pPr marL="0" indent="0">
               <a:buNone/>
             </a:pPr>
             <a:r>
@@ -9670,7 +9843,7 @@
           <a:bodyPr wrap="square" lIns="0" tIns="0" rIns="0" bIns="0" rtlCol="0" anchor="ctr"/>
           <a:lstStyle/>
           <a:p>
-            <a:pPr indent="0" marL="0">
+            <a:pPr marL="0" indent="0">
               <a:buNone/>
             </a:pPr>
             <a:r>
@@ -9709,7 +9882,7 @@
           <a:bodyPr wrap="square" lIns="0" tIns="0" rIns="0" bIns="0" rtlCol="0" anchor="ctr"/>
           <a:lstStyle/>
           <a:p>
-            <a:pPr indent="0" marL="0">
+            <a:pPr marL="0" indent="0">
               <a:buNone/>
             </a:pPr>
             <a:r>
@@ -9748,6 +9921,13 @@
           </a:solidFill>
           <a:ln/>
         </p:spPr>
+        <p:txBody>
+          <a:bodyPr/>
+          <a:lstStyle/>
+          <a:p>
+            <a:endParaRPr lang="en-US"/>
+          </a:p>
+        </p:txBody>
       </p:sp>
       <p:sp>
         <p:nvSpPr>
@@ -9770,7 +9950,7 @@
           <a:bodyPr wrap="square" lIns="0" tIns="0" rIns="0" bIns="0" rtlCol="0" anchor="ctr"/>
           <a:lstStyle/>
           <a:p>
-            <a:pPr algn="ctr" indent="0" marL="0">
+            <a:pPr marL="0" indent="0" algn="ctr">
               <a:buNone/>
             </a:pPr>
             <a:r>
@@ -9807,6 +9987,13 @@
           </a:solidFill>
           <a:ln/>
         </p:spPr>
+        <p:txBody>
+          <a:bodyPr/>
+          <a:lstStyle/>
+          <a:p>
+            <a:endParaRPr lang="en-US"/>
+          </a:p>
+        </p:txBody>
       </p:sp>
       <p:sp>
         <p:nvSpPr>
@@ -9829,7 +10016,7 @@
           <a:bodyPr wrap="square" lIns="0" tIns="0" rIns="0" bIns="0" rtlCol="0" anchor="ctr"/>
           <a:lstStyle/>
           <a:p>
-            <a:pPr indent="0" marL="0">
+            <a:pPr marL="0" indent="0">
               <a:buNone/>
             </a:pPr>
             <a:r>
@@ -9868,7 +10055,7 @@
           <a:bodyPr wrap="square" lIns="0" tIns="0" rIns="0" bIns="0" rtlCol="0" anchor="ctr"/>
           <a:lstStyle/>
           <a:p>
-            <a:pPr algn="r" indent="0" marL="0">
+            <a:pPr marL="0" indent="0" algn="r">
               <a:buNone/>
             </a:pPr>
             <a:r>
@@ -9902,6 +10089,7 @@
         <a:solidFill>
           <a:srgbClr val="F8FAFC"/>
         </a:solidFill>
+        <a:effectLst/>
       </p:bgPr>
     </p:bg>
     <p:spTree>
@@ -9939,11 +10127,11 @@
           <a:bodyPr wrap="square" lIns="0" tIns="0" rIns="0" bIns="0" rtlCol="0" anchor="ctr"/>
           <a:lstStyle/>
           <a:p>
-            <a:pPr indent="0" marL="0">
-              <a:buNone/>
-            </a:pPr>
-            <a:r>
-              <a:rPr lang="en-US" sz="1200" spc="200" kern="0" dirty="0">
+            <a:pPr marL="0" indent="0">
+              <a:buNone/>
+            </a:pPr>
+            <a:r>
+              <a:rPr lang="en-US" sz="1200" kern="0" spc="200" dirty="0">
                 <a:solidFill>
                   <a:srgbClr val="64748B"/>
                 </a:solidFill>
@@ -9978,7 +10166,7 @@
           <a:bodyPr wrap="square" lIns="0" tIns="0" rIns="0" bIns="0" rtlCol="0" anchor="ctr"/>
           <a:lstStyle/>
           <a:p>
-            <a:pPr indent="0" marL="0">
+            <a:pPr marL="0" indent="0">
               <a:buNone/>
             </a:pPr>
             <a:r>
@@ -10017,13 +10205,20 @@
           </a:solidFill>
           <a:ln/>
           <a:effectLst>
-            <a:outerShdw sx="100000" sy="100000" kx="0" ky="0" algn="bl" rotWithShape="0" blurRad="101600" dist="25400" dir="16200000">
+            <a:outerShdw blurRad="101600" dist="25400" dir="16200000" algn="bl" rotWithShape="0">
               <a:srgbClr val="000000">
                 <a:alpha val="6000"/>
               </a:srgbClr>
             </a:outerShdw>
           </a:effectLst>
         </p:spPr>
+        <p:txBody>
+          <a:bodyPr/>
+          <a:lstStyle/>
+          <a:p>
+            <a:endParaRPr lang="en-US"/>
+          </a:p>
+        </p:txBody>
       </p:sp>
       <p:sp>
         <p:nvSpPr>
@@ -10046,6 +10241,13 @@
           </a:solidFill>
           <a:ln/>
         </p:spPr>
+        <p:txBody>
+          <a:bodyPr/>
+          <a:lstStyle/>
+          <a:p>
+            <a:endParaRPr lang="en-US"/>
+          </a:p>
+        </p:txBody>
       </p:sp>
       <p:sp>
         <p:nvSpPr>
@@ -10068,7 +10270,7 @@
           <a:bodyPr wrap="square" lIns="0" tIns="0" rIns="0" bIns="0" rtlCol="0" anchor="ctr"/>
           <a:lstStyle/>
           <a:p>
-            <a:pPr indent="0" marL="0">
+            <a:pPr marL="0" indent="0">
               <a:buNone/>
             </a:pPr>
             <a:r>
@@ -10107,7 +10309,7 @@
           <a:bodyPr wrap="square" lIns="0" tIns="0" rIns="0" bIns="0" rtlCol="0" anchor="ctr"/>
           <a:lstStyle/>
           <a:p>
-            <a:pPr indent="0" marL="0">
+            <a:pPr marL="0" indent="0">
               <a:buNone/>
             </a:pPr>
             <a:r>
@@ -10146,7 +10348,7 @@
           <a:bodyPr wrap="square" lIns="0" tIns="0" rIns="0" bIns="0" rtlCol="0" anchor="ctr"/>
           <a:lstStyle/>
           <a:p>
-            <a:pPr indent="0" marL="0">
+            <a:pPr marL="0" indent="0">
               <a:buNone/>
             </a:pPr>
             <a:r>
@@ -10185,13 +10387,20 @@
           </a:solidFill>
           <a:ln/>
           <a:effectLst>
-            <a:outerShdw sx="100000" sy="100000" kx="0" ky="0" algn="bl" rotWithShape="0" blurRad="101600" dist="25400" dir="16200000">
+            <a:outerShdw blurRad="101600" dist="25400" dir="16200000" algn="bl" rotWithShape="0">
               <a:srgbClr val="000000">
                 <a:alpha val="6000"/>
               </a:srgbClr>
             </a:outerShdw>
           </a:effectLst>
         </p:spPr>
+        <p:txBody>
+          <a:bodyPr/>
+          <a:lstStyle/>
+          <a:p>
+            <a:endParaRPr lang="en-US"/>
+          </a:p>
+        </p:txBody>
       </p:sp>
       <p:sp>
         <p:nvSpPr>
@@ -10214,6 +10423,13 @@
           </a:solidFill>
           <a:ln/>
         </p:spPr>
+        <p:txBody>
+          <a:bodyPr/>
+          <a:lstStyle/>
+          <a:p>
+            <a:endParaRPr lang="en-US"/>
+          </a:p>
+        </p:txBody>
       </p:sp>
       <p:sp>
         <p:nvSpPr>
@@ -10236,7 +10452,7 @@
           <a:bodyPr wrap="square" lIns="0" tIns="0" rIns="0" bIns="0" rtlCol="0" anchor="ctr"/>
           <a:lstStyle/>
           <a:p>
-            <a:pPr indent="0" marL="0">
+            <a:pPr marL="0" indent="0">
               <a:buNone/>
             </a:pPr>
             <a:r>
@@ -10275,7 +10491,7 @@
           <a:bodyPr wrap="square" lIns="0" tIns="0" rIns="0" bIns="0" rtlCol="0" anchor="ctr"/>
           <a:lstStyle/>
           <a:p>
-            <a:pPr indent="0" marL="0">
+            <a:pPr marL="0" indent="0">
               <a:buNone/>
             </a:pPr>
             <a:r>
@@ -10314,7 +10530,7 @@
           <a:bodyPr wrap="square" lIns="0" tIns="0" rIns="0" bIns="0" rtlCol="0" anchor="ctr"/>
           <a:lstStyle/>
           <a:p>
-            <a:pPr indent="0" marL="0">
+            <a:pPr marL="0" indent="0">
               <a:buNone/>
             </a:pPr>
             <a:r>
@@ -10353,13 +10569,20 @@
           </a:solidFill>
           <a:ln/>
           <a:effectLst>
-            <a:outerShdw sx="100000" sy="100000" kx="0" ky="0" algn="bl" rotWithShape="0" blurRad="101600" dist="25400" dir="16200000">
+            <a:outerShdw blurRad="101600" dist="25400" dir="16200000" algn="bl" rotWithShape="0">
               <a:srgbClr val="000000">
                 <a:alpha val="6000"/>
               </a:srgbClr>
             </a:outerShdw>
           </a:effectLst>
         </p:spPr>
+        <p:txBody>
+          <a:bodyPr/>
+          <a:lstStyle/>
+          <a:p>
+            <a:endParaRPr lang="en-US"/>
+          </a:p>
+        </p:txBody>
       </p:sp>
       <p:sp>
         <p:nvSpPr>
@@ -10382,6 +10605,13 @@
           </a:solidFill>
           <a:ln/>
         </p:spPr>
+        <p:txBody>
+          <a:bodyPr/>
+          <a:lstStyle/>
+          <a:p>
+            <a:endParaRPr lang="en-US"/>
+          </a:p>
+        </p:txBody>
       </p:sp>
       <p:sp>
         <p:nvSpPr>
@@ -10404,7 +10634,7 @@
           <a:bodyPr wrap="square" lIns="0" tIns="0" rIns="0" bIns="0" rtlCol="0" anchor="ctr"/>
           <a:lstStyle/>
           <a:p>
-            <a:pPr indent="0" marL="0">
+            <a:pPr marL="0" indent="0">
               <a:buNone/>
             </a:pPr>
             <a:r>
@@ -10443,7 +10673,7 @@
           <a:bodyPr wrap="square" lIns="0" tIns="0" rIns="0" bIns="0" rtlCol="0" anchor="ctr"/>
           <a:lstStyle/>
           <a:p>
-            <a:pPr indent="0" marL="0">
+            <a:pPr marL="0" indent="0">
               <a:buNone/>
             </a:pPr>
             <a:r>
@@ -10482,7 +10712,7 @@
           <a:bodyPr wrap="square" lIns="0" tIns="0" rIns="0" bIns="0" rtlCol="0" anchor="ctr"/>
           <a:lstStyle/>
           <a:p>
-            <a:pPr indent="0" marL="0">
+            <a:pPr marL="0" indent="0">
               <a:buNone/>
             </a:pPr>
             <a:r>
@@ -10521,13 +10751,20 @@
           </a:solidFill>
           <a:ln/>
           <a:effectLst>
-            <a:outerShdw sx="100000" sy="100000" kx="0" ky="0" algn="bl" rotWithShape="0" blurRad="101600" dist="25400" dir="16200000">
+            <a:outerShdw blurRad="101600" dist="25400" dir="16200000" algn="bl" rotWithShape="0">
               <a:srgbClr val="000000">
                 <a:alpha val="6000"/>
               </a:srgbClr>
             </a:outerShdw>
           </a:effectLst>
         </p:spPr>
+        <p:txBody>
+          <a:bodyPr/>
+          <a:lstStyle/>
+          <a:p>
+            <a:endParaRPr lang="en-US"/>
+          </a:p>
+        </p:txBody>
       </p:sp>
       <p:sp>
         <p:nvSpPr>
@@ -10550,6 +10787,13 @@
           </a:solidFill>
           <a:ln/>
         </p:spPr>
+        <p:txBody>
+          <a:bodyPr/>
+          <a:lstStyle/>
+          <a:p>
+            <a:endParaRPr lang="en-US"/>
+          </a:p>
+        </p:txBody>
       </p:sp>
       <p:sp>
         <p:nvSpPr>
@@ -10572,7 +10816,7 @@
           <a:bodyPr wrap="square" lIns="0" tIns="0" rIns="0" bIns="0" rtlCol="0" anchor="ctr"/>
           <a:lstStyle/>
           <a:p>
-            <a:pPr indent="0" marL="0">
+            <a:pPr marL="0" indent="0">
               <a:buNone/>
             </a:pPr>
             <a:r>
@@ -10611,7 +10855,7 @@
           <a:bodyPr wrap="square" lIns="0" tIns="0" rIns="0" bIns="0" rtlCol="0" anchor="ctr"/>
           <a:lstStyle/>
           <a:p>
-            <a:pPr indent="0" marL="0">
+            <a:pPr marL="0" indent="0">
               <a:buNone/>
             </a:pPr>
             <a:r>
@@ -10650,7 +10894,7 @@
           <a:bodyPr wrap="square" lIns="0" tIns="0" rIns="0" bIns="0" rtlCol="0" anchor="ctr"/>
           <a:lstStyle/>
           <a:p>
-            <a:pPr indent="0" marL="0">
+            <a:pPr marL="0" indent="0">
               <a:buNone/>
             </a:pPr>
             <a:r>
@@ -10687,6 +10931,13 @@
           </a:solidFill>
           <a:ln/>
         </p:spPr>
+        <p:txBody>
+          <a:bodyPr/>
+          <a:lstStyle/>
+          <a:p>
+            <a:endParaRPr lang="en-US"/>
+          </a:p>
+        </p:txBody>
       </p:sp>
       <p:sp>
         <p:nvSpPr>
@@ -10709,7 +10960,7 @@
           <a:bodyPr wrap="square" lIns="0" tIns="0" rIns="0" bIns="0" rtlCol="0" anchor="ctr"/>
           <a:lstStyle/>
           <a:p>
-            <a:pPr indent="0" marL="0">
+            <a:pPr marL="0" indent="0">
               <a:buNone/>
             </a:pPr>
             <a:r>
@@ -10748,7 +10999,7 @@
           <a:bodyPr wrap="square" lIns="0" tIns="0" rIns="0" bIns="0" rtlCol="0" anchor="ctr"/>
           <a:lstStyle/>
           <a:p>
-            <a:pPr algn="r" indent="0" marL="0">
+            <a:pPr marL="0" indent="0" algn="r">
               <a:buNone/>
             </a:pPr>
             <a:r>
@@ -10782,6 +11033,7 @@
         <a:solidFill>
           <a:srgbClr val="F8FAFC"/>
         </a:solidFill>
+        <a:effectLst/>
       </p:bgPr>
     </p:bg>
     <p:spTree>
@@ -10819,11 +11071,11 @@
           <a:bodyPr wrap="square" lIns="0" tIns="0" rIns="0" bIns="0" rtlCol="0" anchor="ctr"/>
           <a:lstStyle/>
           <a:p>
-            <a:pPr indent="0" marL="0">
-              <a:buNone/>
-            </a:pPr>
-            <a:r>
-              <a:rPr lang="en-US" sz="1200" spc="200" kern="0" dirty="0">
+            <a:pPr marL="0" indent="0">
+              <a:buNone/>
+            </a:pPr>
+            <a:r>
+              <a:rPr lang="en-US" sz="1200" kern="0" spc="200" dirty="0">
                 <a:solidFill>
                   <a:srgbClr val="64748B"/>
                 </a:solidFill>
@@ -10858,7 +11110,7 @@
           <a:bodyPr wrap="square" lIns="0" tIns="0" rIns="0" bIns="0" rtlCol="0" anchor="ctr"/>
           <a:lstStyle/>
           <a:p>
-            <a:pPr indent="0" marL="0">
+            <a:pPr marL="0" indent="0">
               <a:buNone/>
             </a:pPr>
             <a:r>
@@ -10897,13 +11149,20 @@
           </a:solidFill>
           <a:ln/>
           <a:effectLst>
-            <a:outerShdw sx="100000" sy="100000" kx="0" ky="0" algn="bl" rotWithShape="0" blurRad="101600" dist="25400" dir="16200000">
+            <a:outerShdw blurRad="101600" dist="25400" dir="16200000" algn="bl" rotWithShape="0">
               <a:srgbClr val="000000">
                 <a:alpha val="6000"/>
               </a:srgbClr>
             </a:outerShdw>
           </a:effectLst>
         </p:spPr>
+        <p:txBody>
+          <a:bodyPr/>
+          <a:lstStyle/>
+          <a:p>
+            <a:endParaRPr lang="en-US"/>
+          </a:p>
+        </p:txBody>
       </p:sp>
       <p:sp>
         <p:nvSpPr>
@@ -10924,6 +11183,13 @@
           </a:solidFill>
           <a:ln/>
         </p:spPr>
+        <p:txBody>
+          <a:bodyPr/>
+          <a:lstStyle/>
+          <a:p>
+            <a:endParaRPr lang="en-US"/>
+          </a:p>
+        </p:txBody>
       </p:sp>
       <p:sp>
         <p:nvSpPr>
@@ -10946,7 +11212,7 @@
           <a:bodyPr wrap="square" lIns="0" tIns="0" rIns="0" bIns="0" rtlCol="0" anchor="ctr"/>
           <a:lstStyle/>
           <a:p>
-            <a:pPr algn="ctr" indent="0" marL="0">
+            <a:pPr marL="0" indent="0" algn="ctr">
               <a:buNone/>
             </a:pPr>
             <a:r>
@@ -10985,7 +11251,7 @@
           <a:bodyPr wrap="square" lIns="0" tIns="0" rIns="0" bIns="0" rtlCol="0" anchor="ctr"/>
           <a:lstStyle/>
           <a:p>
-            <a:pPr algn="ctr" indent="0" marL="0">
+            <a:pPr marL="0" indent="0" algn="ctr">
               <a:buNone/>
             </a:pPr>
             <a:r>
@@ -11024,7 +11290,7 @@
           <a:bodyPr wrap="square" lIns="0" tIns="0" rIns="0" bIns="0" rtlCol="0" anchor="ctr"/>
           <a:lstStyle/>
           <a:p>
-            <a:pPr algn="ctr" indent="0" marL="0">
+            <a:pPr marL="0" indent="0" algn="ctr">
               <a:buNone/>
             </a:pPr>
             <a:r>
@@ -11063,7 +11329,7 @@
           <a:bodyPr wrap="square" lIns="0" tIns="0" rIns="0" bIns="0" rtlCol="0" anchor="ctr"/>
           <a:lstStyle/>
           <a:p>
-            <a:pPr indent="0" marL="0">
+            <a:pPr marL="0" indent="0">
               <a:buNone/>
             </a:pPr>
             <a:r>
@@ -11102,13 +11368,20 @@
           </a:solidFill>
           <a:ln/>
           <a:effectLst>
-            <a:outerShdw sx="100000" sy="100000" kx="0" ky="0" algn="bl" rotWithShape="0" blurRad="101600" dist="25400" dir="16200000">
+            <a:outerShdw blurRad="101600" dist="25400" dir="16200000" algn="bl" rotWithShape="0">
               <a:srgbClr val="000000">
                 <a:alpha val="6000"/>
               </a:srgbClr>
             </a:outerShdw>
           </a:effectLst>
         </p:spPr>
+        <p:txBody>
+          <a:bodyPr/>
+          <a:lstStyle/>
+          <a:p>
+            <a:endParaRPr lang="en-US"/>
+          </a:p>
+        </p:txBody>
       </p:sp>
       <p:sp>
         <p:nvSpPr>
@@ -11129,6 +11402,13 @@
           </a:solidFill>
           <a:ln/>
         </p:spPr>
+        <p:txBody>
+          <a:bodyPr/>
+          <a:lstStyle/>
+          <a:p>
+            <a:endParaRPr lang="en-US"/>
+          </a:p>
+        </p:txBody>
       </p:sp>
       <p:sp>
         <p:nvSpPr>
@@ -11151,7 +11431,7 @@
           <a:bodyPr wrap="square" lIns="0" tIns="0" rIns="0" bIns="0" rtlCol="0" anchor="ctr"/>
           <a:lstStyle/>
           <a:p>
-            <a:pPr algn="ctr" indent="0" marL="0">
+            <a:pPr marL="0" indent="0" algn="ctr">
               <a:buNone/>
             </a:pPr>
             <a:r>
@@ -11190,7 +11470,7 @@
           <a:bodyPr wrap="square" lIns="0" tIns="0" rIns="0" bIns="0" rtlCol="0" anchor="ctr"/>
           <a:lstStyle/>
           <a:p>
-            <a:pPr algn="ctr" indent="0" marL="0">
+            <a:pPr marL="0" indent="0" algn="ctr">
               <a:buNone/>
             </a:pPr>
             <a:r>
@@ -11229,7 +11509,7 @@
           <a:bodyPr wrap="square" lIns="0" tIns="0" rIns="0" bIns="0" rtlCol="0" anchor="ctr"/>
           <a:lstStyle/>
           <a:p>
-            <a:pPr algn="ctr" indent="0" marL="0">
+            <a:pPr marL="0" indent="0" algn="ctr">
               <a:buNone/>
             </a:pPr>
             <a:r>
@@ -11268,7 +11548,7 @@
           <a:bodyPr wrap="square" lIns="0" tIns="0" rIns="0" bIns="0" rtlCol="0" anchor="ctr"/>
           <a:lstStyle/>
           <a:p>
-            <a:pPr indent="0" marL="0">
+            <a:pPr marL="0" indent="0">
               <a:buNone/>
             </a:pPr>
             <a:r>
@@ -11307,13 +11587,20 @@
           </a:solidFill>
           <a:ln/>
           <a:effectLst>
-            <a:outerShdw sx="100000" sy="100000" kx="0" ky="0" algn="bl" rotWithShape="0" blurRad="101600" dist="25400" dir="16200000">
+            <a:outerShdw blurRad="101600" dist="25400" dir="16200000" algn="bl" rotWithShape="0">
               <a:srgbClr val="000000">
                 <a:alpha val="6000"/>
               </a:srgbClr>
             </a:outerShdw>
           </a:effectLst>
         </p:spPr>
+        <p:txBody>
+          <a:bodyPr/>
+          <a:lstStyle/>
+          <a:p>
+            <a:endParaRPr lang="en-US"/>
+          </a:p>
+        </p:txBody>
       </p:sp>
       <p:sp>
         <p:nvSpPr>
@@ -11334,6 +11621,13 @@
           </a:solidFill>
           <a:ln/>
         </p:spPr>
+        <p:txBody>
+          <a:bodyPr/>
+          <a:lstStyle/>
+          <a:p>
+            <a:endParaRPr lang="en-US"/>
+          </a:p>
+        </p:txBody>
       </p:sp>
       <p:sp>
         <p:nvSpPr>
@@ -11356,7 +11650,7 @@
           <a:bodyPr wrap="square" lIns="0" tIns="0" rIns="0" bIns="0" rtlCol="0" anchor="ctr"/>
           <a:lstStyle/>
           <a:p>
-            <a:pPr algn="ctr" indent="0" marL="0">
+            <a:pPr marL="0" indent="0" algn="ctr">
               <a:buNone/>
             </a:pPr>
             <a:r>
@@ -11395,7 +11689,7 @@
           <a:bodyPr wrap="square" lIns="0" tIns="0" rIns="0" bIns="0" rtlCol="0" anchor="ctr"/>
           <a:lstStyle/>
           <a:p>
-            <a:pPr algn="ctr" indent="0" marL="0">
+            <a:pPr marL="0" indent="0" algn="ctr">
               <a:buNone/>
             </a:pPr>
             <a:r>
@@ -11434,7 +11728,7 @@
           <a:bodyPr wrap="square" lIns="0" tIns="0" rIns="0" bIns="0" rtlCol="0" anchor="ctr"/>
           <a:lstStyle/>
           <a:p>
-            <a:pPr algn="ctr" indent="0" marL="0">
+            <a:pPr marL="0" indent="0" algn="ctr">
               <a:buNone/>
             </a:pPr>
             <a:r>
@@ -11473,7 +11767,7 @@
           <a:bodyPr wrap="square" lIns="0" tIns="0" rIns="0" bIns="0" rtlCol="0" anchor="ctr"/>
           <a:lstStyle/>
           <a:p>
-            <a:pPr indent="0" marL="0">
+            <a:pPr marL="0" indent="0">
               <a:buNone/>
             </a:pPr>
             <a:r>
@@ -11512,13 +11806,20 @@
           </a:solidFill>
           <a:ln/>
           <a:effectLst>
-            <a:outerShdw sx="100000" sy="100000" kx="0" ky="0" algn="bl" rotWithShape="0" blurRad="101600" dist="25400" dir="16200000">
+            <a:outerShdw blurRad="101600" dist="25400" dir="16200000" algn="bl" rotWithShape="0">
               <a:srgbClr val="000000">
                 <a:alpha val="6000"/>
               </a:srgbClr>
             </a:outerShdw>
           </a:effectLst>
         </p:spPr>
+        <p:txBody>
+          <a:bodyPr/>
+          <a:lstStyle/>
+          <a:p>
+            <a:endParaRPr lang="en-US"/>
+          </a:p>
+        </p:txBody>
       </p:sp>
       <p:sp>
         <p:nvSpPr>
@@ -11539,6 +11840,13 @@
           </a:solidFill>
           <a:ln/>
         </p:spPr>
+        <p:txBody>
+          <a:bodyPr/>
+          <a:lstStyle/>
+          <a:p>
+            <a:endParaRPr lang="en-US"/>
+          </a:p>
+        </p:txBody>
       </p:sp>
       <p:sp>
         <p:nvSpPr>
@@ -11561,7 +11869,7 @@
           <a:bodyPr wrap="square" lIns="0" tIns="0" rIns="0" bIns="0" rtlCol="0" anchor="ctr"/>
           <a:lstStyle/>
           <a:p>
-            <a:pPr algn="ctr" indent="0" marL="0">
+            <a:pPr marL="0" indent="0" algn="ctr">
               <a:buNone/>
             </a:pPr>
             <a:r>
@@ -11600,7 +11908,7 @@
           <a:bodyPr wrap="square" lIns="0" tIns="0" rIns="0" bIns="0" rtlCol="0" anchor="ctr"/>
           <a:lstStyle/>
           <a:p>
-            <a:pPr algn="ctr" indent="0" marL="0">
+            <a:pPr marL="0" indent="0" algn="ctr">
               <a:buNone/>
             </a:pPr>
             <a:r>
@@ -11639,7 +11947,7 @@
           <a:bodyPr wrap="square" lIns="0" tIns="0" rIns="0" bIns="0" rtlCol="0" anchor="ctr"/>
           <a:lstStyle/>
           <a:p>
-            <a:pPr algn="ctr" indent="0" marL="0">
+            <a:pPr marL="0" indent="0" algn="ctr">
               <a:buNone/>
             </a:pPr>
             <a:r>
@@ -11678,7 +11986,7 @@
           <a:bodyPr wrap="square" lIns="0" tIns="0" rIns="0" bIns="0" rtlCol="0" anchor="ctr"/>
           <a:lstStyle/>
           <a:p>
-            <a:pPr indent="0" marL="0">
+            <a:pPr marL="0" indent="0">
               <a:buNone/>
             </a:pPr>
             <a:r>
@@ -11717,13 +12025,20 @@
           </a:solidFill>
           <a:ln/>
           <a:effectLst>
-            <a:outerShdw sx="100000" sy="100000" kx="0" ky="0" algn="bl" rotWithShape="0" blurRad="101600" dist="25400" dir="16200000">
+            <a:outerShdw blurRad="101600" dist="25400" dir="16200000" algn="bl" rotWithShape="0">
               <a:srgbClr val="000000">
                 <a:alpha val="6000"/>
               </a:srgbClr>
             </a:outerShdw>
           </a:effectLst>
         </p:spPr>
+        <p:txBody>
+          <a:bodyPr/>
+          <a:lstStyle/>
+          <a:p>
+            <a:endParaRPr lang="en-US"/>
+          </a:p>
+        </p:txBody>
       </p:sp>
       <p:sp>
         <p:nvSpPr>
@@ -11744,6 +12059,13 @@
           </a:solidFill>
           <a:ln/>
         </p:spPr>
+        <p:txBody>
+          <a:bodyPr/>
+          <a:lstStyle/>
+          <a:p>
+            <a:endParaRPr lang="en-US"/>
+          </a:p>
+        </p:txBody>
       </p:sp>
       <p:sp>
         <p:nvSpPr>
@@ -11766,7 +12088,7 @@
           <a:bodyPr wrap="square" lIns="0" tIns="0" rIns="0" bIns="0" rtlCol="0" anchor="ctr"/>
           <a:lstStyle/>
           <a:p>
-            <a:pPr algn="ctr" indent="0" marL="0">
+            <a:pPr marL="0" indent="0" algn="ctr">
               <a:buNone/>
             </a:pPr>
             <a:r>
@@ -11805,7 +12127,7 @@
           <a:bodyPr wrap="square" lIns="0" tIns="0" rIns="0" bIns="0" rtlCol="0" anchor="ctr"/>
           <a:lstStyle/>
           <a:p>
-            <a:pPr algn="ctr" indent="0" marL="0">
+            <a:pPr marL="0" indent="0" algn="ctr">
               <a:buNone/>
             </a:pPr>
             <a:r>
@@ -11844,7 +12166,7 @@
           <a:bodyPr wrap="square" lIns="0" tIns="0" rIns="0" bIns="0" rtlCol="0" anchor="ctr"/>
           <a:lstStyle/>
           <a:p>
-            <a:pPr algn="ctr" indent="0" marL="0">
+            <a:pPr marL="0" indent="0" algn="ctr">
               <a:buNone/>
             </a:pPr>
             <a:r>
@@ -11883,7 +12205,7 @@
           <a:bodyPr wrap="square" lIns="0" tIns="0" rIns="0" bIns="0" rtlCol="0" anchor="ctr"/>
           <a:lstStyle/>
           <a:p>
-            <a:pPr indent="0" marL="0">
+            <a:pPr marL="0" indent="0">
               <a:buNone/>
             </a:pPr>
             <a:r>
@@ -11922,6 +12244,13 @@
           </a:solidFill>
           <a:ln/>
         </p:spPr>
+        <p:txBody>
+          <a:bodyPr/>
+          <a:lstStyle/>
+          <a:p>
+            <a:endParaRPr lang="en-US"/>
+          </a:p>
+        </p:txBody>
       </p:sp>
       <p:sp>
         <p:nvSpPr>
@@ -11944,7 +12273,7 @@
           <a:bodyPr wrap="square" lIns="0" tIns="0" rIns="0" bIns="0" rtlCol="0" anchor="ctr"/>
           <a:lstStyle/>
           <a:p>
-            <a:pPr algn="ctr" indent="0" marL="0">
+            <a:pPr marL="0" indent="0" algn="ctr">
               <a:buNone/>
             </a:pPr>
             <a:r>
@@ -11983,6 +12312,13 @@
           </a:solidFill>
           <a:ln/>
         </p:spPr>
+        <p:txBody>
+          <a:bodyPr/>
+          <a:lstStyle/>
+          <a:p>
+            <a:endParaRPr lang="en-US"/>
+          </a:p>
+        </p:txBody>
       </p:sp>
       <p:sp>
         <p:nvSpPr>
@@ -12005,7 +12341,7 @@
           <a:bodyPr wrap="square" lIns="0" tIns="0" rIns="0" bIns="0" rtlCol="0" anchor="ctr"/>
           <a:lstStyle/>
           <a:p>
-            <a:pPr algn="ctr" indent="0" marL="0">
+            <a:pPr marL="0" indent="0" algn="ctr">
               <a:buNone/>
             </a:pPr>
             <a:r>
@@ -12044,6 +12380,13 @@
           </a:solidFill>
           <a:ln/>
         </p:spPr>
+        <p:txBody>
+          <a:bodyPr/>
+          <a:lstStyle/>
+          <a:p>
+            <a:endParaRPr lang="en-US"/>
+          </a:p>
+        </p:txBody>
       </p:sp>
       <p:sp>
         <p:nvSpPr>
@@ -12066,7 +12409,7 @@
           <a:bodyPr wrap="square" lIns="0" tIns="0" rIns="0" bIns="0" rtlCol="0" anchor="ctr"/>
           <a:lstStyle/>
           <a:p>
-            <a:pPr algn="ctr" indent="0" marL="0">
+            <a:pPr marL="0" indent="0" algn="ctr">
               <a:buNone/>
             </a:pPr>
             <a:r>
@@ -12105,6 +12448,13 @@
           </a:solidFill>
           <a:ln/>
         </p:spPr>
+        <p:txBody>
+          <a:bodyPr/>
+          <a:lstStyle/>
+          <a:p>
+            <a:endParaRPr lang="en-US"/>
+          </a:p>
+        </p:txBody>
       </p:sp>
       <p:sp>
         <p:nvSpPr>
@@ -12127,7 +12477,7 @@
           <a:bodyPr wrap="square" lIns="0" tIns="0" rIns="0" bIns="0" rtlCol="0" anchor="ctr"/>
           <a:lstStyle/>
           <a:p>
-            <a:pPr algn="ctr" indent="0" marL="0">
+            <a:pPr marL="0" indent="0" algn="ctr">
               <a:buNone/>
             </a:pPr>
             <a:r>
@@ -12166,6 +12516,13 @@
           </a:solidFill>
           <a:ln/>
         </p:spPr>
+        <p:txBody>
+          <a:bodyPr/>
+          <a:lstStyle/>
+          <a:p>
+            <a:endParaRPr lang="en-US"/>
+          </a:p>
+        </p:txBody>
       </p:sp>
       <p:sp>
         <p:nvSpPr>
@@ -12188,7 +12545,7 @@
           <a:bodyPr wrap="square" lIns="0" tIns="0" rIns="0" bIns="0" rtlCol="0" anchor="ctr"/>
           <a:lstStyle/>
           <a:p>
-            <a:pPr algn="ctr" indent="0" marL="0">
+            <a:pPr marL="0" indent="0" algn="ctr">
               <a:buNone/>
             </a:pPr>
             <a:r>
@@ -12227,6 +12584,13 @@
           </a:solidFill>
           <a:ln/>
         </p:spPr>
+        <p:txBody>
+          <a:bodyPr/>
+          <a:lstStyle/>
+          <a:p>
+            <a:endParaRPr lang="en-US"/>
+          </a:p>
+        </p:txBody>
       </p:sp>
       <p:sp>
         <p:nvSpPr>
@@ -12249,7 +12613,7 @@
           <a:bodyPr wrap="square" lIns="0" tIns="0" rIns="0" bIns="0" rtlCol="0" anchor="ctr"/>
           <a:lstStyle/>
           <a:p>
-            <a:pPr algn="ctr" indent="0" marL="0">
+            <a:pPr marL="0" indent="0" algn="ctr">
               <a:buNone/>
             </a:pPr>
             <a:r>
@@ -12286,6 +12650,13 @@
           </a:solidFill>
           <a:ln/>
         </p:spPr>
+        <p:txBody>
+          <a:bodyPr/>
+          <a:lstStyle/>
+          <a:p>
+            <a:endParaRPr lang="en-US"/>
+          </a:p>
+        </p:txBody>
       </p:sp>
       <p:sp>
         <p:nvSpPr>
@@ -12308,7 +12679,7 @@
           <a:bodyPr wrap="square" lIns="0" tIns="0" rIns="0" bIns="0" rtlCol="0" anchor="ctr"/>
           <a:lstStyle/>
           <a:p>
-            <a:pPr indent="0" marL="0">
+            <a:pPr marL="0" indent="0">
               <a:buNone/>
             </a:pPr>
             <a:r>
@@ -12347,7 +12718,7 @@
           <a:bodyPr wrap="square" lIns="0" tIns="0" rIns="0" bIns="0" rtlCol="0" anchor="ctr"/>
           <a:lstStyle/>
           <a:p>
-            <a:pPr algn="r" indent="0" marL="0">
+            <a:pPr marL="0" indent="0" algn="r">
               <a:buNone/>
             </a:pPr>
             <a:r>
@@ -12381,6 +12752,7 @@
         <a:solidFill>
           <a:srgbClr val="F8FAFC"/>
         </a:solidFill>
+        <a:effectLst/>
       </p:bgPr>
     </p:bg>
     <p:spTree>
@@ -12418,11 +12790,11 @@
           <a:bodyPr wrap="square" lIns="0" tIns="0" rIns="0" bIns="0" rtlCol="0" anchor="ctr"/>
           <a:lstStyle/>
           <a:p>
-            <a:pPr indent="0" marL="0">
-              <a:buNone/>
-            </a:pPr>
-            <a:r>
-              <a:rPr lang="en-US" sz="1200" spc="200" kern="0" dirty="0">
+            <a:pPr marL="0" indent="0">
+              <a:buNone/>
+            </a:pPr>
+            <a:r>
+              <a:rPr lang="en-US" sz="1200" kern="0" spc="200" dirty="0">
                 <a:solidFill>
                   <a:srgbClr val="64748B"/>
                 </a:solidFill>
@@ -12457,7 +12829,7 @@
           <a:bodyPr wrap="square" lIns="0" tIns="0" rIns="0" bIns="0" rtlCol="0" anchor="ctr"/>
           <a:lstStyle/>
           <a:p>
-            <a:pPr indent="0" marL="0">
+            <a:pPr marL="0" indent="0">
               <a:buNone/>
             </a:pPr>
             <a:r>
@@ -12496,13 +12868,20 @@
           </a:solidFill>
           <a:ln/>
           <a:effectLst>
-            <a:outerShdw sx="100000" sy="100000" kx="0" ky="0" algn="bl" rotWithShape="0" blurRad="101600" dist="25400" dir="16200000">
+            <a:outerShdw blurRad="101600" dist="25400" dir="16200000" algn="bl" rotWithShape="0">
               <a:srgbClr val="000000">
                 <a:alpha val="6000"/>
               </a:srgbClr>
             </a:outerShdw>
           </a:effectLst>
         </p:spPr>
+        <p:txBody>
+          <a:bodyPr/>
+          <a:lstStyle/>
+          <a:p>
+            <a:endParaRPr lang="en-US"/>
+          </a:p>
+        </p:txBody>
       </p:sp>
       <p:sp>
         <p:nvSpPr>
@@ -12525,6 +12904,13 @@
           </a:solidFill>
           <a:ln/>
         </p:spPr>
+        <p:txBody>
+          <a:bodyPr/>
+          <a:lstStyle/>
+          <a:p>
+            <a:endParaRPr lang="en-US"/>
+          </a:p>
+        </p:txBody>
       </p:sp>
       <p:sp>
         <p:nvSpPr>
@@ -12547,7 +12933,7 @@
           <a:bodyPr wrap="square" lIns="0" tIns="0" rIns="0" bIns="0" rtlCol="0" anchor="ctr"/>
           <a:lstStyle/>
           <a:p>
-            <a:pPr algn="ctr" indent="0" marL="0">
+            <a:pPr marL="0" indent="0" algn="ctr">
               <a:buNone/>
             </a:pPr>
             <a:r>
@@ -12586,7 +12972,7 @@
           <a:bodyPr wrap="square" lIns="0" tIns="0" rIns="0" bIns="0" rtlCol="0" anchor="ctr"/>
           <a:lstStyle/>
           <a:p>
-            <a:pPr indent="0" marL="0">
+            <a:pPr marL="0" indent="0">
               <a:buNone/>
             </a:pPr>
             <a:r>
@@ -12625,7 +13011,7 @@
           <a:bodyPr wrap="square" lIns="0" tIns="0" rIns="0" bIns="0" rtlCol="0" anchor="ctr"/>
           <a:lstStyle/>
           <a:p>
-            <a:pPr indent="0" marL="0">
+            <a:pPr marL="0" indent="0">
               <a:buNone/>
             </a:pPr>
             <a:r>
@@ -12664,13 +13050,20 @@
           </a:solidFill>
           <a:ln/>
           <a:effectLst>
-            <a:outerShdw sx="100000" sy="100000" kx="0" ky="0" algn="bl" rotWithShape="0" blurRad="101600" dist="25400" dir="16200000">
+            <a:outerShdw blurRad="101600" dist="25400" dir="16200000" algn="bl" rotWithShape="0">
               <a:srgbClr val="000000">
                 <a:alpha val="6000"/>
               </a:srgbClr>
             </a:outerShdw>
           </a:effectLst>
         </p:spPr>
+        <p:txBody>
+          <a:bodyPr/>
+          <a:lstStyle/>
+          <a:p>
+            <a:endParaRPr lang="en-US"/>
+          </a:p>
+        </p:txBody>
       </p:sp>
       <p:sp>
         <p:nvSpPr>
@@ -12693,6 +13086,13 @@
           </a:solidFill>
           <a:ln/>
         </p:spPr>
+        <p:txBody>
+          <a:bodyPr/>
+          <a:lstStyle/>
+          <a:p>
+            <a:endParaRPr lang="en-US"/>
+          </a:p>
+        </p:txBody>
       </p:sp>
       <p:sp>
         <p:nvSpPr>
@@ -12715,7 +13115,7 @@
           <a:bodyPr wrap="square" lIns="0" tIns="0" rIns="0" bIns="0" rtlCol="0" anchor="ctr"/>
           <a:lstStyle/>
           <a:p>
-            <a:pPr algn="ctr" indent="0" marL="0">
+            <a:pPr marL="0" indent="0" algn="ctr">
               <a:buNone/>
             </a:pPr>
             <a:r>
@@ -12754,7 +13154,7 @@
           <a:bodyPr wrap="square" lIns="0" tIns="0" rIns="0" bIns="0" rtlCol="0" anchor="ctr"/>
           <a:lstStyle/>
           <a:p>
-            <a:pPr indent="0" marL="0">
+            <a:pPr marL="0" indent="0">
               <a:buNone/>
             </a:pPr>
             <a:r>
@@ -12793,7 +13193,7 @@
           <a:bodyPr wrap="square" lIns="0" tIns="0" rIns="0" bIns="0" rtlCol="0" anchor="ctr"/>
           <a:lstStyle/>
           <a:p>
-            <a:pPr indent="0" marL="0">
+            <a:pPr marL="0" indent="0">
               <a:buNone/>
             </a:pPr>
             <a:r>
@@ -12832,13 +13232,20 @@
           </a:solidFill>
           <a:ln/>
           <a:effectLst>
-            <a:outerShdw sx="100000" sy="100000" kx="0" ky="0" algn="bl" rotWithShape="0" blurRad="101600" dist="25400" dir="16200000">
+            <a:outerShdw blurRad="101600" dist="25400" dir="16200000" algn="bl" rotWithShape="0">
               <a:srgbClr val="000000">
                 <a:alpha val="6000"/>
               </a:srgbClr>
             </a:outerShdw>
           </a:effectLst>
         </p:spPr>
+        <p:txBody>
+          <a:bodyPr/>
+          <a:lstStyle/>
+          <a:p>
+            <a:endParaRPr lang="en-US"/>
+          </a:p>
+        </p:txBody>
       </p:sp>
       <p:sp>
         <p:nvSpPr>
@@ -12861,6 +13268,13 @@
           </a:solidFill>
           <a:ln/>
         </p:spPr>
+        <p:txBody>
+          <a:bodyPr/>
+          <a:lstStyle/>
+          <a:p>
+            <a:endParaRPr lang="en-US"/>
+          </a:p>
+        </p:txBody>
       </p:sp>
       <p:sp>
         <p:nvSpPr>
@@ -12883,7 +13297,7 @@
           <a:bodyPr wrap="square" lIns="0" tIns="0" rIns="0" bIns="0" rtlCol="0" anchor="ctr"/>
           <a:lstStyle/>
           <a:p>
-            <a:pPr algn="ctr" indent="0" marL="0">
+            <a:pPr marL="0" indent="0" algn="ctr">
               <a:buNone/>
             </a:pPr>
             <a:r>
@@ -12922,7 +13336,7 @@
           <a:bodyPr wrap="square" lIns="0" tIns="0" rIns="0" bIns="0" rtlCol="0" anchor="ctr"/>
           <a:lstStyle/>
           <a:p>
-            <a:pPr indent="0" marL="0">
+            <a:pPr marL="0" indent="0">
               <a:buNone/>
             </a:pPr>
             <a:r>
@@ -12961,7 +13375,7 @@
           <a:bodyPr wrap="square" lIns="0" tIns="0" rIns="0" bIns="0" rtlCol="0" anchor="ctr"/>
           <a:lstStyle/>
           <a:p>
-            <a:pPr indent="0" marL="0">
+            <a:pPr marL="0" indent="0">
               <a:buNone/>
             </a:pPr>
             <a:r>
@@ -13000,13 +13414,20 @@
           </a:solidFill>
           <a:ln/>
           <a:effectLst>
-            <a:outerShdw sx="100000" sy="100000" kx="0" ky="0" algn="bl" rotWithShape="0" blurRad="101600" dist="25400" dir="16200000">
+            <a:outerShdw blurRad="101600" dist="25400" dir="16200000" algn="bl" rotWithShape="0">
               <a:srgbClr val="000000">
                 <a:alpha val="6000"/>
               </a:srgbClr>
             </a:outerShdw>
           </a:effectLst>
         </p:spPr>
+        <p:txBody>
+          <a:bodyPr/>
+          <a:lstStyle/>
+          <a:p>
+            <a:endParaRPr lang="en-US"/>
+          </a:p>
+        </p:txBody>
       </p:sp>
       <p:sp>
         <p:nvSpPr>
@@ -13029,6 +13450,13 @@
           </a:solidFill>
           <a:ln/>
         </p:spPr>
+        <p:txBody>
+          <a:bodyPr/>
+          <a:lstStyle/>
+          <a:p>
+            <a:endParaRPr lang="en-US"/>
+          </a:p>
+        </p:txBody>
       </p:sp>
       <p:sp>
         <p:nvSpPr>
@@ -13051,7 +13479,7 @@
           <a:bodyPr wrap="square" lIns="0" tIns="0" rIns="0" bIns="0" rtlCol="0" anchor="ctr"/>
           <a:lstStyle/>
           <a:p>
-            <a:pPr algn="ctr" indent="0" marL="0">
+            <a:pPr marL="0" indent="0" algn="ctr">
               <a:buNone/>
             </a:pPr>
             <a:r>
@@ -13090,7 +13518,7 @@
           <a:bodyPr wrap="square" lIns="0" tIns="0" rIns="0" bIns="0" rtlCol="0" anchor="ctr"/>
           <a:lstStyle/>
           <a:p>
-            <a:pPr indent="0" marL="0">
+            <a:pPr marL="0" indent="0">
               <a:buNone/>
             </a:pPr>
             <a:r>
@@ -13129,7 +13557,7 @@
           <a:bodyPr wrap="square" lIns="0" tIns="0" rIns="0" bIns="0" rtlCol="0" anchor="ctr"/>
           <a:lstStyle/>
           <a:p>
-            <a:pPr indent="0" marL="0">
+            <a:pPr marL="0" indent="0">
               <a:buNone/>
             </a:pPr>
             <a:r>
@@ -13168,13 +13596,20 @@
           </a:solidFill>
           <a:ln/>
           <a:effectLst>
-            <a:outerShdw sx="100000" sy="100000" kx="0" ky="0" algn="bl" rotWithShape="0" blurRad="101600" dist="25400" dir="16200000">
+            <a:outerShdw blurRad="101600" dist="25400" dir="16200000" algn="bl" rotWithShape="0">
               <a:srgbClr val="000000">
                 <a:alpha val="6000"/>
               </a:srgbClr>
             </a:outerShdw>
           </a:effectLst>
         </p:spPr>
+        <p:txBody>
+          <a:bodyPr/>
+          <a:lstStyle/>
+          <a:p>
+            <a:endParaRPr lang="en-US"/>
+          </a:p>
+        </p:txBody>
       </p:sp>
       <p:sp>
         <p:nvSpPr>
@@ -13197,6 +13632,13 @@
           </a:solidFill>
           <a:ln/>
         </p:spPr>
+        <p:txBody>
+          <a:bodyPr/>
+          <a:lstStyle/>
+          <a:p>
+            <a:endParaRPr lang="en-US"/>
+          </a:p>
+        </p:txBody>
       </p:sp>
       <p:sp>
         <p:nvSpPr>
@@ -13219,7 +13661,7 @@
           <a:bodyPr wrap="square" lIns="0" tIns="0" rIns="0" bIns="0" rtlCol="0" anchor="ctr"/>
           <a:lstStyle/>
           <a:p>
-            <a:pPr algn="ctr" indent="0" marL="0">
+            <a:pPr marL="0" indent="0" algn="ctr">
               <a:buNone/>
             </a:pPr>
             <a:r>
@@ -13258,7 +13700,7 @@
           <a:bodyPr wrap="square" lIns="0" tIns="0" rIns="0" bIns="0" rtlCol="0" anchor="ctr"/>
           <a:lstStyle/>
           <a:p>
-            <a:pPr indent="0" marL="0">
+            <a:pPr marL="0" indent="0">
               <a:buNone/>
             </a:pPr>
             <a:r>
@@ -13297,7 +13739,7 @@
           <a:bodyPr wrap="square" lIns="0" tIns="0" rIns="0" bIns="0" rtlCol="0" anchor="ctr"/>
           <a:lstStyle/>
           <a:p>
-            <a:pPr indent="0" marL="0">
+            <a:pPr marL="0" indent="0">
               <a:buNone/>
             </a:pPr>
             <a:r>
@@ -13336,13 +13778,20 @@
           </a:solidFill>
           <a:ln/>
           <a:effectLst>
-            <a:outerShdw sx="100000" sy="100000" kx="0" ky="0" algn="bl" rotWithShape="0" blurRad="101600" dist="25400" dir="16200000">
+            <a:outerShdw blurRad="101600" dist="25400" dir="16200000" algn="bl" rotWithShape="0">
               <a:srgbClr val="000000">
                 <a:alpha val="6000"/>
               </a:srgbClr>
             </a:outerShdw>
           </a:effectLst>
         </p:spPr>
+        <p:txBody>
+          <a:bodyPr/>
+          <a:lstStyle/>
+          <a:p>
+            <a:endParaRPr lang="en-US"/>
+          </a:p>
+        </p:txBody>
       </p:sp>
       <p:sp>
         <p:nvSpPr>
@@ -13365,6 +13814,13 @@
           </a:solidFill>
           <a:ln/>
         </p:spPr>
+        <p:txBody>
+          <a:bodyPr/>
+          <a:lstStyle/>
+          <a:p>
+            <a:endParaRPr lang="en-US"/>
+          </a:p>
+        </p:txBody>
       </p:sp>
       <p:sp>
         <p:nvSpPr>
@@ -13387,7 +13843,7 @@
           <a:bodyPr wrap="square" lIns="0" tIns="0" rIns="0" bIns="0" rtlCol="0" anchor="ctr"/>
           <a:lstStyle/>
           <a:p>
-            <a:pPr algn="ctr" indent="0" marL="0">
+            <a:pPr marL="0" indent="0" algn="ctr">
               <a:buNone/>
             </a:pPr>
             <a:r>
@@ -13426,7 +13882,7 @@
           <a:bodyPr wrap="square" lIns="0" tIns="0" rIns="0" bIns="0" rtlCol="0" anchor="ctr"/>
           <a:lstStyle/>
           <a:p>
-            <a:pPr indent="0" marL="0">
+            <a:pPr marL="0" indent="0">
               <a:buNone/>
             </a:pPr>
             <a:r>
@@ -13465,7 +13921,7 @@
           <a:bodyPr wrap="square" lIns="0" tIns="0" rIns="0" bIns="0" rtlCol="0" anchor="ctr"/>
           <a:lstStyle/>
           <a:p>
-            <a:pPr indent="0" marL="0">
+            <a:pPr marL="0" indent="0">
               <a:buNone/>
             </a:pPr>
             <a:r>
@@ -13502,6 +13958,13 @@
           </a:solidFill>
           <a:ln/>
         </p:spPr>
+        <p:txBody>
+          <a:bodyPr/>
+          <a:lstStyle/>
+          <a:p>
+            <a:endParaRPr lang="en-US"/>
+          </a:p>
+        </p:txBody>
       </p:sp>
       <p:sp>
         <p:nvSpPr>
@@ -13524,7 +13987,7 @@
           <a:bodyPr wrap="square" lIns="0" tIns="0" rIns="0" bIns="0" rtlCol="0" anchor="ctr"/>
           <a:lstStyle/>
           <a:p>
-            <a:pPr indent="0" marL="0">
+            <a:pPr marL="0" indent="0">
               <a:buNone/>
             </a:pPr>
             <a:r>
@@ -13563,7 +14026,7 @@
           <a:bodyPr wrap="square" lIns="0" tIns="0" rIns="0" bIns="0" rtlCol="0" anchor="ctr"/>
           <a:lstStyle/>
           <a:p>
-            <a:pPr algn="r" indent="0" marL="0">
+            <a:pPr marL="0" indent="0" algn="r">
               <a:buNone/>
             </a:pPr>
             <a:r>
@@ -13882,4 +14345,319 @@
     </a:ext>
   </a:extLst>
 </a:theme>
+</file>
+
+<file path=ppt/theme/theme2.xml><?xml version="1.0" encoding="utf-8"?>
+<a:theme xmlns:a="http://schemas.openxmlformats.org/drawingml/2006/main" name="Office Theme">
+  <a:themeElements>
+    <a:clrScheme name="Office">
+      <a:dk1>
+        <a:sysClr val="windowText" lastClr="000000"/>
+      </a:dk1>
+      <a:lt1>
+        <a:sysClr val="window" lastClr="FFFFFF"/>
+      </a:lt1>
+      <a:dk2>
+        <a:srgbClr val="0E2841"/>
+      </a:dk2>
+      <a:lt2>
+        <a:srgbClr val="E8E8E8"/>
+      </a:lt2>
+      <a:accent1>
+        <a:srgbClr val="156082"/>
+      </a:accent1>
+      <a:accent2>
+        <a:srgbClr val="E97132"/>
+      </a:accent2>
+      <a:accent3>
+        <a:srgbClr val="196B24"/>
+      </a:accent3>
+      <a:accent4>
+        <a:srgbClr val="0F9ED5"/>
+      </a:accent4>
+      <a:accent5>
+        <a:srgbClr val="A02B93"/>
+      </a:accent5>
+      <a:accent6>
+        <a:srgbClr val="4EA72E"/>
+      </a:accent6>
+      <a:hlink>
+        <a:srgbClr val="467886"/>
+      </a:hlink>
+      <a:folHlink>
+        <a:srgbClr val="96607D"/>
+      </a:folHlink>
+    </a:clrScheme>
+    <a:fontScheme name="Office">
+      <a:majorFont>
+        <a:latin typeface="Aptos Display" panose="02110004020202020204"/>
+        <a:ea typeface=""/>
+        <a:cs typeface=""/>
+        <a:font script="Jpan" typeface="游ゴシック Light"/>
+        <a:font script="Hang" typeface="맑은 고딕"/>
+        <a:font script="Hans" typeface="等线 Light"/>
+        <a:font script="Hant" typeface="新細明體"/>
+        <a:font script="Arab" typeface="Times New Roman"/>
+        <a:font script="Hebr" typeface="Times New Roman"/>
+        <a:font script="Thai" typeface="Angsana New"/>
+        <a:font script="Ethi" typeface="Nyala"/>
+        <a:font script="Beng" typeface="Vrinda"/>
+        <a:font script="Gujr" typeface="Shruti"/>
+        <a:font script="Khmr" typeface="MoolBoran"/>
+        <a:font script="Knda" typeface="Tunga"/>
+        <a:font script="Guru" typeface="Raavi"/>
+        <a:font script="Cans" typeface="Euphemia"/>
+        <a:font script="Cher" typeface="Plantagenet Cherokee"/>
+        <a:font script="Yiii" typeface="Microsoft Yi Baiti"/>
+        <a:font script="Tibt" typeface="Microsoft Himalaya"/>
+        <a:font script="Thaa" typeface="MV Boli"/>
+        <a:font script="Deva" typeface="Mangal"/>
+        <a:font script="Telu" typeface="Gautami"/>
+        <a:font script="Taml" typeface="Latha"/>
+        <a:font script="Syrc" typeface="Estrangelo Edessa"/>
+        <a:font script="Orya" typeface="Kalinga"/>
+        <a:font script="Mlym" typeface="Kartika"/>
+        <a:font script="Laoo" typeface="DokChampa"/>
+        <a:font script="Sinh" typeface="Iskoola Pota"/>
+        <a:font script="Mong" typeface="Mongolian Baiti"/>
+        <a:font script="Viet" typeface="Times New Roman"/>
+        <a:font script="Uigh" typeface="Microsoft Uighur"/>
+        <a:font script="Geor" typeface="Sylfaen"/>
+        <a:font script="Armn" typeface="Arial"/>
+        <a:font script="Bugi" typeface="Leelawadee UI"/>
+        <a:font script="Bopo" typeface="Microsoft JhengHei"/>
+        <a:font script="Java" typeface="Javanese Text"/>
+        <a:font script="Lisu" typeface="Segoe UI"/>
+        <a:font script="Mymr" typeface="Myanmar Text"/>
+        <a:font script="Nkoo" typeface="Ebrima"/>
+        <a:font script="Olck" typeface="Nirmala UI"/>
+        <a:font script="Osma" typeface="Ebrima"/>
+        <a:font script="Phag" typeface="Phagspa"/>
+        <a:font script="Syrn" typeface="Estrangelo Edessa"/>
+        <a:font script="Syrj" typeface="Estrangelo Edessa"/>
+        <a:font script="Syre" typeface="Estrangelo Edessa"/>
+        <a:font script="Sora" typeface="Nirmala UI"/>
+        <a:font script="Tale" typeface="Microsoft Tai Le"/>
+        <a:font script="Talu" typeface="Microsoft New Tai Lue"/>
+        <a:font script="Tfng" typeface="Ebrima"/>
+      </a:majorFont>
+      <a:minorFont>
+        <a:latin typeface="Aptos" panose="02110004020202020204"/>
+        <a:ea typeface=""/>
+        <a:cs typeface=""/>
+        <a:font script="Jpan" typeface="游ゴシック"/>
+        <a:font script="Hang" typeface="맑은 고딕"/>
+        <a:font script="Hans" typeface="等线"/>
+        <a:font script="Hant" typeface="新細明體"/>
+        <a:font script="Arab" typeface="Arial"/>
+        <a:font script="Hebr" typeface="Arial"/>
+        <a:font script="Thai" typeface="Cordia New"/>
+        <a:font script="Ethi" typeface="Nyala"/>
+        <a:font script="Beng" typeface="Vrinda"/>
+        <a:font script="Gujr" typeface="Shruti"/>
+        <a:font script="Khmr" typeface="DaunPenh"/>
+        <a:font script="Knda" typeface="Tunga"/>
+        <a:font script="Guru" typeface="Raavi"/>
+        <a:font script="Cans" typeface="Euphemia"/>
+        <a:font script="Cher" typeface="Plantagenet Cherokee"/>
+        <a:font script="Yiii" typeface="Microsoft Yi Baiti"/>
+        <a:font script="Tibt" typeface="Microsoft Himalaya"/>
+        <a:font script="Thaa" typeface="MV Boli"/>
+        <a:font script="Deva" typeface="Mangal"/>
+        <a:font script="Telu" typeface="Gautami"/>
+        <a:font script="Taml" typeface="Latha"/>
+        <a:font script="Syrc" typeface="Estrangelo Edessa"/>
+        <a:font script="Orya" typeface="Kalinga"/>
+        <a:font script="Mlym" typeface="Kartika"/>
+        <a:font script="Laoo" typeface="DokChampa"/>
+        <a:font script="Sinh" typeface="Iskoola Pota"/>
+        <a:font script="Mong" typeface="Mongolian Baiti"/>
+        <a:font script="Viet" typeface="Arial"/>
+        <a:font script="Uigh" typeface="Microsoft Uighur"/>
+        <a:font script="Geor" typeface="Sylfaen"/>
+        <a:font script="Armn" typeface="Arial"/>
+        <a:font script="Bugi" typeface="Leelawadee UI"/>
+        <a:font script="Bopo" typeface="Microsoft JhengHei"/>
+        <a:font script="Java" typeface="Javanese Text"/>
+        <a:font script="Lisu" typeface="Segoe UI"/>
+        <a:font script="Mymr" typeface="Myanmar Text"/>
+        <a:font script="Nkoo" typeface="Ebrima"/>
+        <a:font script="Olck" typeface="Nirmala UI"/>
+        <a:font script="Osma" typeface="Ebrima"/>
+        <a:font script="Phag" typeface="Phagspa"/>
+        <a:font script="Syrn" typeface="Estrangelo Edessa"/>
+        <a:font script="Syrj" typeface="Estrangelo Edessa"/>
+        <a:font script="Syre" typeface="Estrangelo Edessa"/>
+        <a:font script="Sora" typeface="Nirmala UI"/>
+        <a:font script="Tale" typeface="Microsoft Tai Le"/>
+        <a:font script="Talu" typeface="Microsoft New Tai Lue"/>
+        <a:font script="Tfng" typeface="Ebrima"/>
+      </a:minorFont>
+    </a:fontScheme>
+    <a:fmtScheme name="Office">
+      <a:fillStyleLst>
+        <a:solidFill>
+          <a:schemeClr val="phClr"/>
+        </a:solidFill>
+        <a:gradFill rotWithShape="1">
+          <a:gsLst>
+            <a:gs pos="0">
+              <a:schemeClr val="phClr">
+                <a:lumMod val="110000"/>
+                <a:satMod val="105000"/>
+                <a:tint val="67000"/>
+              </a:schemeClr>
+            </a:gs>
+            <a:gs pos="50000">
+              <a:schemeClr val="phClr">
+                <a:lumMod val="105000"/>
+                <a:satMod val="103000"/>
+                <a:tint val="73000"/>
+              </a:schemeClr>
+            </a:gs>
+            <a:gs pos="100000">
+              <a:schemeClr val="phClr">
+                <a:lumMod val="105000"/>
+                <a:satMod val="109000"/>
+                <a:tint val="81000"/>
+              </a:schemeClr>
+            </a:gs>
+          </a:gsLst>
+          <a:lin ang="5400000" scaled="0"/>
+        </a:gradFill>
+        <a:gradFill rotWithShape="1">
+          <a:gsLst>
+            <a:gs pos="0">
+              <a:schemeClr val="phClr">
+                <a:satMod val="103000"/>
+                <a:lumMod val="102000"/>
+                <a:tint val="94000"/>
+              </a:schemeClr>
+            </a:gs>
+            <a:gs pos="50000">
+              <a:schemeClr val="phClr">
+                <a:satMod val="110000"/>
+                <a:lumMod val="100000"/>
+                <a:shade val="100000"/>
+              </a:schemeClr>
+            </a:gs>
+            <a:gs pos="100000">
+              <a:schemeClr val="phClr">
+                <a:lumMod val="99000"/>
+                <a:satMod val="120000"/>
+                <a:shade val="78000"/>
+              </a:schemeClr>
+            </a:gs>
+          </a:gsLst>
+          <a:lin ang="5400000" scaled="0"/>
+        </a:gradFill>
+      </a:fillStyleLst>
+      <a:lnStyleLst>
+        <a:ln w="12700" cap="flat" cmpd="sng" algn="ctr">
+          <a:solidFill>
+            <a:schemeClr val="phClr"/>
+          </a:solidFill>
+          <a:prstDash val="solid"/>
+          <a:miter lim="800000"/>
+        </a:ln>
+        <a:ln w="19050" cap="flat" cmpd="sng" algn="ctr">
+          <a:solidFill>
+            <a:schemeClr val="phClr"/>
+          </a:solidFill>
+          <a:prstDash val="solid"/>
+          <a:miter lim="800000"/>
+        </a:ln>
+        <a:ln w="25400" cap="flat" cmpd="sng" algn="ctr">
+          <a:solidFill>
+            <a:schemeClr val="phClr"/>
+          </a:solidFill>
+          <a:prstDash val="solid"/>
+          <a:miter lim="800000"/>
+        </a:ln>
+      </a:lnStyleLst>
+      <a:effectStyleLst>
+        <a:effectStyle>
+          <a:effectLst/>
+        </a:effectStyle>
+        <a:effectStyle>
+          <a:effectLst/>
+        </a:effectStyle>
+        <a:effectStyle>
+          <a:effectLst>
+            <a:outerShdw blurRad="57150" dist="19050" dir="5400000" algn="ctr" rotWithShape="0">
+              <a:srgbClr val="000000">
+                <a:alpha val="63000"/>
+              </a:srgbClr>
+            </a:outerShdw>
+          </a:effectLst>
+        </a:effectStyle>
+      </a:effectStyleLst>
+      <a:bgFillStyleLst>
+        <a:solidFill>
+          <a:schemeClr val="phClr"/>
+        </a:solidFill>
+        <a:solidFill>
+          <a:schemeClr val="phClr">
+            <a:tint val="95000"/>
+            <a:satMod val="170000"/>
+          </a:schemeClr>
+        </a:solidFill>
+        <a:gradFill rotWithShape="1">
+          <a:gsLst>
+            <a:gs pos="0">
+              <a:schemeClr val="phClr">
+                <a:tint val="93000"/>
+                <a:satMod val="150000"/>
+                <a:shade val="98000"/>
+                <a:lumMod val="102000"/>
+              </a:schemeClr>
+            </a:gs>
+            <a:gs pos="50000">
+              <a:schemeClr val="phClr">
+                <a:tint val="98000"/>
+                <a:satMod val="130000"/>
+                <a:shade val="90000"/>
+                <a:lumMod val="103000"/>
+              </a:schemeClr>
+            </a:gs>
+            <a:gs pos="100000">
+              <a:schemeClr val="phClr">
+                <a:shade val="63000"/>
+                <a:satMod val="120000"/>
+              </a:schemeClr>
+            </a:gs>
+          </a:gsLst>
+          <a:lin ang="5400000" scaled="0"/>
+        </a:gradFill>
+      </a:bgFillStyleLst>
+    </a:fmtScheme>
+  </a:themeElements>
+  <a:objectDefaults>
+    <a:lnDef>
+      <a:spPr/>
+      <a:bodyPr/>
+      <a:lstStyle/>
+      <a:style>
+        <a:lnRef idx="2">
+          <a:schemeClr val="accent1"/>
+        </a:lnRef>
+        <a:fillRef idx="0">
+          <a:schemeClr val="accent1"/>
+        </a:fillRef>
+        <a:effectRef idx="1">
+          <a:schemeClr val="accent1"/>
+        </a:effectRef>
+        <a:fontRef idx="minor">
+          <a:schemeClr val="tx1"/>
+        </a:fontRef>
+      </a:style>
+    </a:lnDef>
+  </a:objectDefaults>
+  <a:extraClrSchemeLst/>
+  <a:extLst>
+    <a:ext uri="{05A4C25C-085E-4340-85A3-A5531E510DB2}">
+      <thm15:themeFamily xmlns:thm15="http://schemas.microsoft.com/office/thememl/2012/main" name="Office Theme" id="{2E142A2C-CD16-42D6-873A-C26D2A0506FA}" vid="{1BDDFF52-6CD6-40A5-AB3C-68EB2F1E4D0A}"/>
+    </a:ext>
+  </a:extLst>
+</a:theme>
 </file>
--- a/Presentasi_SPK_Pemilihan_Lokasi_Cabang_Baru.pptx
+++ b/Presentasi_SPK_Pemilihan_Lokasi_Cabang_Baru.pptx
@@ -4495,7 +4495,40 @@
                 <a:ea typeface="Arial" pitchFamily="34" charset="-122"/>
                 <a:cs typeface="Arial" pitchFamily="34" charset="-120"/>
               </a:rPr>
-              <a:t>Siap untuk demonstrasi aplikasi &amp; sesi tanya jawab</a:t>
+              <a:t>Siap untuk </a:t>
+            </a:r>
+            <a:r>
+              <a:rPr lang="en-US" sz="1800" dirty="0" err="1">
+                <a:solidFill>
+                  <a:srgbClr val="94A3B8"/>
+                </a:solidFill>
+                <a:latin typeface="Arial" pitchFamily="34" charset="0"/>
+                <a:ea typeface="Arial" pitchFamily="34" charset="-122"/>
+                <a:cs typeface="Arial" pitchFamily="34" charset="-120"/>
+              </a:rPr>
+              <a:t>demonstrasi</a:t>
+            </a:r>
+            <a:r>
+              <a:rPr lang="en-US" sz="1800" dirty="0">
+                <a:solidFill>
+                  <a:srgbClr val="94A3B8"/>
+                </a:solidFill>
+                <a:latin typeface="Arial" pitchFamily="34" charset="0"/>
+                <a:ea typeface="Arial" pitchFamily="34" charset="-122"/>
+                <a:cs typeface="Arial" pitchFamily="34" charset="-120"/>
+              </a:rPr>
+              <a:t> </a:t>
+            </a:r>
+            <a:r>
+              <a:rPr lang="en-US" sz="1800" dirty="0" err="1">
+                <a:solidFill>
+                  <a:srgbClr val="94A3B8"/>
+                </a:solidFill>
+                <a:latin typeface="Arial" pitchFamily="34" charset="0"/>
+                <a:ea typeface="Arial" pitchFamily="34" charset="-122"/>
+                <a:cs typeface="Arial" pitchFamily="34" charset="-120"/>
+              </a:rPr>
+              <a:t>aplikasi</a:t>
             </a:r>
             <a:endParaRPr lang="en-US" sz="1800" dirty="0"/>
           </a:p>

--- a/Presentasi_SPK_Pemilihan_Lokasi_Cabang_Baru.pptx
+++ b/Presentasi_SPK_Pemilihan_Lokasi_Cabang_Baru.pptx
@@ -4495,40 +4495,7 @@
                 <a:ea typeface="Arial" pitchFamily="34" charset="-122"/>
                 <a:cs typeface="Arial" pitchFamily="34" charset="-120"/>
               </a:rPr>
-              <a:t>Siap untuk </a:t>
-            </a:r>
-            <a:r>
-              <a:rPr lang="en-US" sz="1800" dirty="0" err="1">
-                <a:solidFill>
-                  <a:srgbClr val="94A3B8"/>
-                </a:solidFill>
-                <a:latin typeface="Arial" pitchFamily="34" charset="0"/>
-                <a:ea typeface="Arial" pitchFamily="34" charset="-122"/>
-                <a:cs typeface="Arial" pitchFamily="34" charset="-120"/>
-              </a:rPr>
-              <a:t>demonstrasi</a:t>
-            </a:r>
-            <a:r>
-              <a:rPr lang="en-US" sz="1800" dirty="0">
-                <a:solidFill>
-                  <a:srgbClr val="94A3B8"/>
-                </a:solidFill>
-                <a:latin typeface="Arial" pitchFamily="34" charset="0"/>
-                <a:ea typeface="Arial" pitchFamily="34" charset="-122"/>
-                <a:cs typeface="Arial" pitchFamily="34" charset="-120"/>
-              </a:rPr>
-              <a:t> </a:t>
-            </a:r>
-            <a:r>
-              <a:rPr lang="en-US" sz="1800" dirty="0" err="1">
-                <a:solidFill>
-                  <a:srgbClr val="94A3B8"/>
-                </a:solidFill>
-                <a:latin typeface="Arial" pitchFamily="34" charset="0"/>
-                <a:ea typeface="Arial" pitchFamily="34" charset="-122"/>
-                <a:cs typeface="Arial" pitchFamily="34" charset="-120"/>
-              </a:rPr>
-              <a:t>aplikasi</a:t>
+              <a:t>Siap untuk demonstrasi aplikasi &amp; sesi tanya jawab</a:t>
             </a:r>
             <a:endParaRPr lang="en-US" sz="1800" dirty="0"/>
           </a:p>
